--- a/ITN_Module_6 - 7.pptx
+++ b/ITN_Module_6 - 7.pptx
@@ -239,478 +239,123 @@
 </p:cmAuthorLst>
 </file>
 
+<file path=ppt/revisionInfo.xml><?xml version="1.0" encoding="utf-8"?>
+<p1510:revInfo xmlns:a="http://schemas.openxmlformats.org/drawingml/2006/main" xmlns:r="http://schemas.openxmlformats.org/officeDocument/2006/relationships" xmlns:p1510="http://schemas.microsoft.com/office/powerpoint/2015/10/main">
+  <p1510:revLst>
+    <p1510:client id="{FD8598E2-1370-3343-8009-04C6ABA03D60}" v="29" dt="2026-02-18T07:30:22.719"/>
+  </p1510:revLst>
+</p1510:revInfo>
+</file>
+
 <file path=ppt/changesInfos/changesInfo1.xml><?xml version="1.0" encoding="utf-8"?>
 <pc:chgInfo xmlns:a="http://schemas.openxmlformats.org/drawingml/2006/main" xmlns:r="http://schemas.openxmlformats.org/officeDocument/2006/relationships" xmlns:ac="http://schemas.microsoft.com/office/drawing/2013/main/command" xmlns:pc="http://schemas.microsoft.com/office/powerpoint/2013/main/command">
   <pc:docChgLst>
-    <pc:chgData name="Baráth, Július" userId="aebde9b9-dccc-4475-a9ac-c05e78323d7a" providerId="ADAL" clId="{3E9DB731-F485-2E42-8959-FCC77CF1512F}"/>
-    <pc:docChg chg="modSld">
-      <pc:chgData name="Baráth, Július" userId="aebde9b9-dccc-4475-a9ac-c05e78323d7a" providerId="ADAL" clId="{3E9DB731-F485-2E42-8959-FCC77CF1512F}" dt="2023-03-21T06:10:35.635" v="8" actId="20577"/>
+    <pc:chgData name="Baráth, Július" userId="aebde9b9-dccc-4475-a9ac-c05e78323d7a" providerId="ADAL" clId="{4A0811C8-ED2F-505E-B787-C8270CED5046}"/>
+    <pc:docChg chg="undo custSel modSld">
+      <pc:chgData name="Baráth, Július" userId="aebde9b9-dccc-4475-a9ac-c05e78323d7a" providerId="ADAL" clId="{4A0811C8-ED2F-505E-B787-C8270CED5046}" dt="2026-02-18T07:35:25.868" v="103" actId="1076"/>
       <pc:docMkLst>
         <pc:docMk/>
       </pc:docMkLst>
-      <pc:sldChg chg="modSp mod">
-        <pc:chgData name="Baráth, Július" userId="aebde9b9-dccc-4475-a9ac-c05e78323d7a" providerId="ADAL" clId="{3E9DB731-F485-2E42-8959-FCC77CF1512F}" dt="2023-03-21T06:10:35.635" v="8" actId="20577"/>
+      <pc:sldChg chg="addSp delSp modSp mod">
+        <pc:chgData name="Baráth, Július" userId="aebde9b9-dccc-4475-a9ac-c05e78323d7a" providerId="ADAL" clId="{4A0811C8-ED2F-505E-B787-C8270CED5046}" dt="2026-02-18T07:25:23.648" v="45" actId="1036"/>
         <pc:sldMkLst>
           <pc:docMk/>
-          <pc:sldMk cId="1060275143" sldId="1091"/>
+          <pc:sldMk cId="4106652241" sldId="1093"/>
         </pc:sldMkLst>
+        <pc:spChg chg="mod">
+          <ac:chgData name="Baráth, Július" userId="aebde9b9-dccc-4475-a9ac-c05e78323d7a" providerId="ADAL" clId="{4A0811C8-ED2F-505E-B787-C8270CED5046}" dt="2026-02-18T07:22:26.302" v="29" actId="14100"/>
+          <ac:spMkLst>
+            <pc:docMk/>
+            <pc:sldMk cId="4106652241" sldId="1093"/>
+            <ac:spMk id="6" creationId="{4003F5F5-7654-47FE-8245-0FE364DE3A10}"/>
+          </ac:spMkLst>
+        </pc:spChg>
+        <pc:picChg chg="add del mod">
+          <ac:chgData name="Baráth, Július" userId="aebde9b9-dccc-4475-a9ac-c05e78323d7a" providerId="ADAL" clId="{4A0811C8-ED2F-505E-B787-C8270CED5046}" dt="2026-02-18T07:24:35.719" v="40" actId="478"/>
+          <ac:picMkLst>
+            <pc:docMk/>
+            <pc:sldMk cId="4106652241" sldId="1093"/>
+            <ac:picMk id="1026" creationId="{DC80C083-E7DC-C492-19D6-7E7187B5CE48}"/>
+          </ac:picMkLst>
+        </pc:picChg>
+        <pc:picChg chg="add mod">
+          <ac:chgData name="Baráth, Július" userId="aebde9b9-dccc-4475-a9ac-c05e78323d7a" providerId="ADAL" clId="{4A0811C8-ED2F-505E-B787-C8270CED5046}" dt="2026-02-18T07:22:26.302" v="29" actId="14100"/>
+          <ac:picMkLst>
+            <pc:docMk/>
+            <pc:sldMk cId="4106652241" sldId="1093"/>
+            <ac:picMk id="1028" creationId="{4E0CB0E7-3AE7-4174-6498-8FE9B7EC3D6E}"/>
+          </ac:picMkLst>
+        </pc:picChg>
+        <pc:picChg chg="add mod">
+          <ac:chgData name="Baráth, Július" userId="aebde9b9-dccc-4475-a9ac-c05e78323d7a" providerId="ADAL" clId="{4A0811C8-ED2F-505E-B787-C8270CED5046}" dt="2026-02-18T07:22:56.479" v="36" actId="1076"/>
+          <ac:picMkLst>
+            <pc:docMk/>
+            <pc:sldMk cId="4106652241" sldId="1093"/>
+            <ac:picMk id="1030" creationId="{AA3333AF-72A2-0C00-8A02-8C62E29EEE47}"/>
+          </ac:picMkLst>
+        </pc:picChg>
+        <pc:picChg chg="add mod">
+          <ac:chgData name="Baráth, Július" userId="aebde9b9-dccc-4475-a9ac-c05e78323d7a" providerId="ADAL" clId="{4A0811C8-ED2F-505E-B787-C8270CED5046}" dt="2026-02-18T07:24:04.910" v="39" actId="1076"/>
+          <ac:picMkLst>
+            <pc:docMk/>
+            <pc:sldMk cId="4106652241" sldId="1093"/>
+            <ac:picMk id="1032" creationId="{1E8F2856-286F-7322-AF81-49D73C40AE06}"/>
+          </ac:picMkLst>
+        </pc:picChg>
+        <pc:picChg chg="add mod">
+          <ac:chgData name="Baráth, Július" userId="aebde9b9-dccc-4475-a9ac-c05e78323d7a" providerId="ADAL" clId="{4A0811C8-ED2F-505E-B787-C8270CED5046}" dt="2026-02-18T07:25:23.648" v="45" actId="1036"/>
+          <ac:picMkLst>
+            <pc:docMk/>
+            <pc:sldMk cId="4106652241" sldId="1093"/>
+            <ac:picMk id="1034" creationId="{660EE9EB-B216-4E36-181B-6ADB0BBC8FFA}"/>
+          </ac:picMkLst>
+        </pc:picChg>
       </pc:sldChg>
-    </pc:docChg>
-  </pc:docChgLst>
-  <pc:docChgLst>
-    <pc:chgData name="Július Baráth" userId="e650c4ab-697e-4750-bd58-c1531aabce95" providerId="ADAL" clId="{224C7222-0FFC-4E4D-8F8F-67FF4A45E017}"/>
-    <pc:docChg chg="addSld delSld modSld">
-      <pc:chgData name="Július Baráth" userId="e650c4ab-697e-4750-bd58-c1531aabce95" providerId="ADAL" clId="{224C7222-0FFC-4E4D-8F8F-67FF4A45E017}" dt="2020-01-20T10:53:48.686" v="16" actId="2696"/>
-      <pc:docMkLst>
-        <pc:docMk/>
-      </pc:docMkLst>
-      <pc:sldChg chg="del">
-        <pc:chgData name="Július Baráth" userId="e650c4ab-697e-4750-bd58-c1531aabce95" providerId="ADAL" clId="{224C7222-0FFC-4E4D-8F8F-67FF4A45E017}" dt="2020-01-20T10:52:25.140" v="5" actId="2696"/>
+      <pc:sldChg chg="addSp delSp modSp mod chgLayout">
+        <pc:chgData name="Baráth, Július" userId="aebde9b9-dccc-4475-a9ac-c05e78323d7a" providerId="ADAL" clId="{4A0811C8-ED2F-505E-B787-C8270CED5046}" dt="2026-02-18T07:16:25.434" v="16" actId="120"/>
         <pc:sldMkLst>
           <pc:docMk/>
-          <pc:sldMk cId="4190828277" sldId="291"/>
+          <pc:sldMk cId="1594353498" sldId="1099"/>
         </pc:sldMkLst>
+        <pc:spChg chg="add del mod">
+          <ac:chgData name="Baráth, Július" userId="aebde9b9-dccc-4475-a9ac-c05e78323d7a" providerId="ADAL" clId="{4A0811C8-ED2F-505E-B787-C8270CED5046}" dt="2026-02-18T07:15:27.254" v="2" actId="6264"/>
+          <ac:spMkLst>
+            <pc:docMk/>
+            <pc:sldMk cId="1594353498" sldId="1099"/>
+            <ac:spMk id="2" creationId="{014D8090-061C-287C-AB24-3F8636A62195}"/>
+          </ac:spMkLst>
+        </pc:spChg>
+        <pc:spChg chg="add del mod ord">
+          <ac:chgData name="Baráth, Július" userId="aebde9b9-dccc-4475-a9ac-c05e78323d7a" providerId="ADAL" clId="{4A0811C8-ED2F-505E-B787-C8270CED5046}" dt="2026-02-18T07:15:27.254" v="2" actId="6264"/>
+          <ac:spMkLst>
+            <pc:docMk/>
+            <pc:sldMk cId="1594353498" sldId="1099"/>
+            <ac:spMk id="3" creationId="{49F10DE4-B576-01F9-A20E-1A091130D82F}"/>
+          </ac:spMkLst>
+        </pc:spChg>
+        <pc:spChg chg="mod ord">
+          <ac:chgData name="Baráth, Július" userId="aebde9b9-dccc-4475-a9ac-c05e78323d7a" providerId="ADAL" clId="{4A0811C8-ED2F-505E-B787-C8270CED5046}" dt="2026-02-18T07:16:25.434" v="16" actId="120"/>
+          <ac:spMkLst>
+            <pc:docMk/>
+            <pc:sldMk cId="1594353498" sldId="1099"/>
+            <ac:spMk id="6" creationId="{4003F5F5-7654-47FE-8245-0FE364DE3A10}"/>
+          </ac:spMkLst>
+        </pc:spChg>
       </pc:sldChg>
-      <pc:sldChg chg="del">
-        <pc:chgData name="Július Baráth" userId="e650c4ab-697e-4750-bd58-c1531aabce95" providerId="ADAL" clId="{224C7222-0FFC-4E4D-8F8F-67FF4A45E017}" dt="2020-01-20T10:51:21.364" v="1" actId="2696"/>
-        <pc:sldMkLst>
-          <pc:docMk/>
-          <pc:sldMk cId="111192384" sldId="860"/>
-        </pc:sldMkLst>
-      </pc:sldChg>
-      <pc:sldChg chg="del">
-        <pc:chgData name="Július Baráth" userId="e650c4ab-697e-4750-bd58-c1531aabce95" providerId="ADAL" clId="{224C7222-0FFC-4E4D-8F8F-67FF4A45E017}" dt="2020-01-20T10:52:23.757" v="4" actId="2696"/>
-        <pc:sldMkLst>
-          <pc:docMk/>
-          <pc:sldMk cId="3271745509" sldId="874"/>
-        </pc:sldMkLst>
-      </pc:sldChg>
-      <pc:sldChg chg="del">
-        <pc:chgData name="Július Baráth" userId="e650c4ab-697e-4750-bd58-c1531aabce95" providerId="ADAL" clId="{224C7222-0FFC-4E4D-8F8F-67FF4A45E017}" dt="2020-01-20T10:52:19.910" v="2" actId="2696"/>
-        <pc:sldMkLst>
-          <pc:docMk/>
-          <pc:sldMk cId="410599242" sldId="957"/>
-        </pc:sldMkLst>
-      </pc:sldChg>
-      <pc:sldChg chg="del">
-        <pc:chgData name="Július Baráth" userId="e650c4ab-697e-4750-bd58-c1531aabce95" providerId="ADAL" clId="{224C7222-0FFC-4E4D-8F8F-67FF4A45E017}" dt="2020-01-20T10:52:21.710" v="3" actId="2696"/>
-        <pc:sldMkLst>
-          <pc:docMk/>
-          <pc:sldMk cId="2548999575" sldId="958"/>
-        </pc:sldMkLst>
-      </pc:sldChg>
-      <pc:sldChg chg="add">
-        <pc:chgData name="Július Baráth" userId="e650c4ab-697e-4750-bd58-c1531aabce95" providerId="ADAL" clId="{224C7222-0FFC-4E4D-8F8F-67FF4A45E017}" dt="2020-01-20T10:51:14.245" v="0"/>
-        <pc:sldMkLst>
-          <pc:docMk/>
-          <pc:sldMk cId="4248406921" sldId="1103"/>
-        </pc:sldMkLst>
-      </pc:sldChg>
-      <pc:sldChg chg="add del">
-        <pc:chgData name="Július Baráth" userId="e650c4ab-697e-4750-bd58-c1531aabce95" providerId="ADAL" clId="{224C7222-0FFC-4E4D-8F8F-67FF4A45E017}" dt="2020-01-20T10:52:27.406" v="6" actId="2696"/>
-        <pc:sldMkLst>
-          <pc:docMk/>
-          <pc:sldMk cId="3381725916" sldId="1104"/>
-        </pc:sldMkLst>
-      </pc:sldChg>
-      <pc:sldChg chg="add">
-        <pc:chgData name="Július Baráth" userId="e650c4ab-697e-4750-bd58-c1531aabce95" providerId="ADAL" clId="{224C7222-0FFC-4E4D-8F8F-67FF4A45E017}" dt="2020-01-20T10:51:14.245" v="0"/>
-        <pc:sldMkLst>
-          <pc:docMk/>
-          <pc:sldMk cId="2294941180" sldId="1105"/>
-        </pc:sldMkLst>
-      </pc:sldChg>
-      <pc:sldChg chg="add">
-        <pc:chgData name="Július Baráth" userId="e650c4ab-697e-4750-bd58-c1531aabce95" providerId="ADAL" clId="{224C7222-0FFC-4E4D-8F8F-67FF4A45E017}" dt="2020-01-20T10:51:14.245" v="0"/>
-        <pc:sldMkLst>
-          <pc:docMk/>
-          <pc:sldMk cId="878001765" sldId="1106"/>
-        </pc:sldMkLst>
-      </pc:sldChg>
-      <pc:sldChg chg="add">
-        <pc:chgData name="Július Baráth" userId="e650c4ab-697e-4750-bd58-c1531aabce95" providerId="ADAL" clId="{224C7222-0FFC-4E4D-8F8F-67FF4A45E017}" dt="2020-01-20T10:51:14.245" v="0"/>
+      <pc:sldChg chg="addSp modSp mod">
+        <pc:chgData name="Baráth, Július" userId="aebde9b9-dccc-4475-a9ac-c05e78323d7a" providerId="ADAL" clId="{4A0811C8-ED2F-505E-B787-C8270CED5046}" dt="2026-02-18T07:35:25.868" v="103" actId="1076"/>
         <pc:sldMkLst>
           <pc:docMk/>
           <pc:sldMk cId="875630627" sldId="1107"/>
         </pc:sldMkLst>
-      </pc:sldChg>
-      <pc:sldChg chg="add">
-        <pc:chgData name="Július Baráth" userId="e650c4ab-697e-4750-bd58-c1531aabce95" providerId="ADAL" clId="{224C7222-0FFC-4E4D-8F8F-67FF4A45E017}" dt="2020-01-20T10:51:14.245" v="0"/>
-        <pc:sldMkLst>
-          <pc:docMk/>
-          <pc:sldMk cId="3855208254" sldId="1108"/>
-        </pc:sldMkLst>
-      </pc:sldChg>
-      <pc:sldChg chg="add">
-        <pc:chgData name="Július Baráth" userId="e650c4ab-697e-4750-bd58-c1531aabce95" providerId="ADAL" clId="{224C7222-0FFC-4E4D-8F8F-67FF4A45E017}" dt="2020-01-20T10:51:14.245" v="0"/>
-        <pc:sldMkLst>
-          <pc:docMk/>
-          <pc:sldMk cId="3014441826" sldId="1109"/>
-        </pc:sldMkLst>
-      </pc:sldChg>
-      <pc:sldChg chg="add">
-        <pc:chgData name="Július Baráth" userId="e650c4ab-697e-4750-bd58-c1531aabce95" providerId="ADAL" clId="{224C7222-0FFC-4E4D-8F8F-67FF4A45E017}" dt="2020-01-20T10:51:14.245" v="0"/>
-        <pc:sldMkLst>
-          <pc:docMk/>
-          <pc:sldMk cId="3452850491" sldId="1110"/>
-        </pc:sldMkLst>
-      </pc:sldChg>
-      <pc:sldChg chg="add">
-        <pc:chgData name="Július Baráth" userId="e650c4ab-697e-4750-bd58-c1531aabce95" providerId="ADAL" clId="{224C7222-0FFC-4E4D-8F8F-67FF4A45E017}" dt="2020-01-20T10:51:14.245" v="0"/>
-        <pc:sldMkLst>
-          <pc:docMk/>
-          <pc:sldMk cId="1171550552" sldId="1111"/>
-        </pc:sldMkLst>
-      </pc:sldChg>
-      <pc:sldChg chg="add">
-        <pc:chgData name="Július Baráth" userId="e650c4ab-697e-4750-bd58-c1531aabce95" providerId="ADAL" clId="{224C7222-0FFC-4E4D-8F8F-67FF4A45E017}" dt="2020-01-20T10:51:14.245" v="0"/>
-        <pc:sldMkLst>
-          <pc:docMk/>
-          <pc:sldMk cId="2283387875" sldId="1112"/>
-        </pc:sldMkLst>
-      </pc:sldChg>
-      <pc:sldChg chg="add">
-        <pc:chgData name="Július Baráth" userId="e650c4ab-697e-4750-bd58-c1531aabce95" providerId="ADAL" clId="{224C7222-0FFC-4E4D-8F8F-67FF4A45E017}" dt="2020-01-20T10:51:14.245" v="0"/>
-        <pc:sldMkLst>
-          <pc:docMk/>
-          <pc:sldMk cId="3812914703" sldId="1113"/>
-        </pc:sldMkLst>
-      </pc:sldChg>
-      <pc:sldChg chg="add">
-        <pc:chgData name="Július Baráth" userId="e650c4ab-697e-4750-bd58-c1531aabce95" providerId="ADAL" clId="{224C7222-0FFC-4E4D-8F8F-67FF4A45E017}" dt="2020-01-20T10:51:14.245" v="0"/>
-        <pc:sldMkLst>
-          <pc:docMk/>
-          <pc:sldMk cId="1837327114" sldId="1114"/>
-        </pc:sldMkLst>
-      </pc:sldChg>
-      <pc:sldChg chg="add">
-        <pc:chgData name="Július Baráth" userId="e650c4ab-697e-4750-bd58-c1531aabce95" providerId="ADAL" clId="{224C7222-0FFC-4E4D-8F8F-67FF4A45E017}" dt="2020-01-20T10:51:14.245" v="0"/>
-        <pc:sldMkLst>
-          <pc:docMk/>
-          <pc:sldMk cId="211396067" sldId="1115"/>
-        </pc:sldMkLst>
-      </pc:sldChg>
-      <pc:sldChg chg="add">
-        <pc:chgData name="Július Baráth" userId="e650c4ab-697e-4750-bd58-c1531aabce95" providerId="ADAL" clId="{224C7222-0FFC-4E4D-8F8F-67FF4A45E017}" dt="2020-01-20T10:51:14.245" v="0"/>
-        <pc:sldMkLst>
-          <pc:docMk/>
-          <pc:sldMk cId="4124895431" sldId="1116"/>
-        </pc:sldMkLst>
-      </pc:sldChg>
-      <pc:sldChg chg="add">
-        <pc:chgData name="Július Baráth" userId="e650c4ab-697e-4750-bd58-c1531aabce95" providerId="ADAL" clId="{224C7222-0FFC-4E4D-8F8F-67FF4A45E017}" dt="2020-01-20T10:51:14.245" v="0"/>
-        <pc:sldMkLst>
-          <pc:docMk/>
-          <pc:sldMk cId="4138779883" sldId="1117"/>
-        </pc:sldMkLst>
-      </pc:sldChg>
-      <pc:sldChg chg="add">
-        <pc:chgData name="Július Baráth" userId="e650c4ab-697e-4750-bd58-c1531aabce95" providerId="ADAL" clId="{224C7222-0FFC-4E4D-8F8F-67FF4A45E017}" dt="2020-01-20T10:51:14.245" v="0"/>
-        <pc:sldMkLst>
-          <pc:docMk/>
-          <pc:sldMk cId="671932030" sldId="1118"/>
-        </pc:sldMkLst>
-      </pc:sldChg>
-      <pc:sldChg chg="add">
-        <pc:chgData name="Július Baráth" userId="e650c4ab-697e-4750-bd58-c1531aabce95" providerId="ADAL" clId="{224C7222-0FFC-4E4D-8F8F-67FF4A45E017}" dt="2020-01-20T10:51:14.245" v="0"/>
-        <pc:sldMkLst>
-          <pc:docMk/>
-          <pc:sldMk cId="20216327" sldId="1119"/>
-        </pc:sldMkLst>
-      </pc:sldChg>
-      <pc:sldChg chg="add">
-        <pc:chgData name="Július Baráth" userId="e650c4ab-697e-4750-bd58-c1531aabce95" providerId="ADAL" clId="{224C7222-0FFC-4E4D-8F8F-67FF4A45E017}" dt="2020-01-20T10:51:14.245" v="0"/>
-        <pc:sldMkLst>
-          <pc:docMk/>
-          <pc:sldMk cId="3574884029" sldId="1120"/>
-        </pc:sldMkLst>
-      </pc:sldChg>
-      <pc:sldChg chg="add">
-        <pc:chgData name="Július Baráth" userId="e650c4ab-697e-4750-bd58-c1531aabce95" providerId="ADAL" clId="{224C7222-0FFC-4E4D-8F8F-67FF4A45E017}" dt="2020-01-20T10:51:14.245" v="0"/>
-        <pc:sldMkLst>
-          <pc:docMk/>
-          <pc:sldMk cId="491299049" sldId="1121"/>
-        </pc:sldMkLst>
-      </pc:sldChg>
-      <pc:sldChg chg="add">
-        <pc:chgData name="Július Baráth" userId="e650c4ab-697e-4750-bd58-c1531aabce95" providerId="ADAL" clId="{224C7222-0FFC-4E4D-8F8F-67FF4A45E017}" dt="2020-01-20T10:51:14.245" v="0"/>
-        <pc:sldMkLst>
-          <pc:docMk/>
-          <pc:sldMk cId="3539145390" sldId="1122"/>
-        </pc:sldMkLst>
-      </pc:sldChg>
-      <pc:sldChg chg="add del">
-        <pc:chgData name="Július Baráth" userId="e650c4ab-697e-4750-bd58-c1531aabce95" providerId="ADAL" clId="{224C7222-0FFC-4E4D-8F8F-67FF4A45E017}" dt="2020-01-20T10:52:54.527" v="7" actId="2696"/>
-        <pc:sldMkLst>
-          <pc:docMk/>
-          <pc:sldMk cId="62423040" sldId="1123"/>
-        </pc:sldMkLst>
-      </pc:sldChg>
-      <pc:sldChg chg="add del">
-        <pc:chgData name="Július Baráth" userId="e650c4ab-697e-4750-bd58-c1531aabce95" providerId="ADAL" clId="{224C7222-0FFC-4E4D-8F8F-67FF4A45E017}" dt="2020-01-20T10:53:05.133" v="8" actId="2696"/>
-        <pc:sldMkLst>
-          <pc:docMk/>
-          <pc:sldMk cId="129243892" sldId="1124"/>
-        </pc:sldMkLst>
-      </pc:sldChg>
-      <pc:sldChg chg="add del">
-        <pc:chgData name="Július Baráth" userId="e650c4ab-697e-4750-bd58-c1531aabce95" providerId="ADAL" clId="{224C7222-0FFC-4E4D-8F8F-67FF4A45E017}" dt="2020-01-20T10:53:25.980" v="11" actId="2696"/>
-        <pc:sldMkLst>
-          <pc:docMk/>
-          <pc:sldMk cId="440715370" sldId="1125"/>
-        </pc:sldMkLst>
-      </pc:sldChg>
-      <pc:sldChg chg="add del">
-        <pc:chgData name="Július Baráth" userId="e650c4ab-697e-4750-bd58-c1531aabce95" providerId="ADAL" clId="{224C7222-0FFC-4E4D-8F8F-67FF4A45E017}" dt="2020-01-20T10:53:24.205" v="9" actId="2696"/>
-        <pc:sldMkLst>
-          <pc:docMk/>
-          <pc:sldMk cId="2268759550" sldId="1126"/>
-        </pc:sldMkLst>
-      </pc:sldChg>
-      <pc:sldChg chg="add del">
-        <pc:chgData name="Július Baráth" userId="e650c4ab-697e-4750-bd58-c1531aabce95" providerId="ADAL" clId="{224C7222-0FFC-4E4D-8F8F-67FF4A45E017}" dt="2020-01-20T10:53:25.104" v="10" actId="2696"/>
-        <pc:sldMkLst>
-          <pc:docMk/>
-          <pc:sldMk cId="1044991381" sldId="1127"/>
-        </pc:sldMkLst>
-      </pc:sldChg>
-      <pc:sldChg chg="add">
-        <pc:chgData name="Július Baráth" userId="e650c4ab-697e-4750-bd58-c1531aabce95" providerId="ADAL" clId="{224C7222-0FFC-4E4D-8F8F-67FF4A45E017}" dt="2020-01-20T10:51:14.245" v="0"/>
-        <pc:sldMkLst>
-          <pc:docMk/>
-          <pc:sldMk cId="791866242" sldId="1128"/>
-        </pc:sldMkLst>
-      </pc:sldChg>
-      <pc:sldChg chg="add">
-        <pc:chgData name="Július Baráth" userId="e650c4ab-697e-4750-bd58-c1531aabce95" providerId="ADAL" clId="{224C7222-0FFC-4E4D-8F8F-67FF4A45E017}" dt="2020-01-20T10:51:14.245" v="0"/>
-        <pc:sldMkLst>
-          <pc:docMk/>
-          <pc:sldMk cId="1801216291" sldId="1129"/>
-        </pc:sldMkLst>
-      </pc:sldChg>
-      <pc:sldChg chg="add">
-        <pc:chgData name="Július Baráth" userId="e650c4ab-697e-4750-bd58-c1531aabce95" providerId="ADAL" clId="{224C7222-0FFC-4E4D-8F8F-67FF4A45E017}" dt="2020-01-20T10:51:14.245" v="0"/>
-        <pc:sldMkLst>
-          <pc:docMk/>
-          <pc:sldMk cId="3298082407" sldId="1130"/>
-        </pc:sldMkLst>
-      </pc:sldChg>
-      <pc:sldChg chg="add">
-        <pc:chgData name="Július Baráth" userId="e650c4ab-697e-4750-bd58-c1531aabce95" providerId="ADAL" clId="{224C7222-0FFC-4E4D-8F8F-67FF4A45E017}" dt="2020-01-20T10:51:14.245" v="0"/>
-        <pc:sldMkLst>
-          <pc:docMk/>
-          <pc:sldMk cId="3946480745" sldId="1131"/>
-        </pc:sldMkLst>
-      </pc:sldChg>
-      <pc:sldChg chg="add">
-        <pc:chgData name="Július Baráth" userId="e650c4ab-697e-4750-bd58-c1531aabce95" providerId="ADAL" clId="{224C7222-0FFC-4E4D-8F8F-67FF4A45E017}" dt="2020-01-20T10:51:14.245" v="0"/>
-        <pc:sldMkLst>
-          <pc:docMk/>
-          <pc:sldMk cId="2826984039" sldId="1132"/>
-        </pc:sldMkLst>
-      </pc:sldChg>
-      <pc:sldChg chg="add">
-        <pc:chgData name="Július Baráth" userId="e650c4ab-697e-4750-bd58-c1531aabce95" providerId="ADAL" clId="{224C7222-0FFC-4E4D-8F8F-67FF4A45E017}" dt="2020-01-20T10:51:14.245" v="0"/>
-        <pc:sldMkLst>
-          <pc:docMk/>
-          <pc:sldMk cId="1865120625" sldId="1133"/>
-        </pc:sldMkLst>
-      </pc:sldChg>
-      <pc:sldChg chg="add">
-        <pc:chgData name="Július Baráth" userId="e650c4ab-697e-4750-bd58-c1531aabce95" providerId="ADAL" clId="{224C7222-0FFC-4E4D-8F8F-67FF4A45E017}" dt="2020-01-20T10:51:14.245" v="0"/>
-        <pc:sldMkLst>
-          <pc:docMk/>
-          <pc:sldMk cId="773546262" sldId="1134"/>
-        </pc:sldMkLst>
-      </pc:sldChg>
-      <pc:sldChg chg="add del">
-        <pc:chgData name="Július Baráth" userId="e650c4ab-697e-4750-bd58-c1531aabce95" providerId="ADAL" clId="{224C7222-0FFC-4E4D-8F8F-67FF4A45E017}" dt="2020-01-20T10:53:46.153" v="12" actId="2696"/>
-        <pc:sldMkLst>
-          <pc:docMk/>
-          <pc:sldMk cId="1048334215" sldId="1135"/>
-        </pc:sldMkLst>
-      </pc:sldChg>
-      <pc:sldChg chg="add del">
-        <pc:chgData name="Július Baráth" userId="e650c4ab-697e-4750-bd58-c1531aabce95" providerId="ADAL" clId="{224C7222-0FFC-4E4D-8F8F-67FF4A45E017}" dt="2020-01-20T10:53:47.154" v="13" actId="2696"/>
-        <pc:sldMkLst>
-          <pc:docMk/>
-          <pc:sldMk cId="712119327" sldId="1136"/>
-        </pc:sldMkLst>
-      </pc:sldChg>
-      <pc:sldChg chg="add del">
-        <pc:chgData name="Július Baráth" userId="e650c4ab-697e-4750-bd58-c1531aabce95" providerId="ADAL" clId="{224C7222-0FFC-4E4D-8F8F-67FF4A45E017}" dt="2020-01-20T10:53:47.771" v="14" actId="2696"/>
-        <pc:sldMkLst>
-          <pc:docMk/>
-          <pc:sldMk cId="2752077252" sldId="1137"/>
-        </pc:sldMkLst>
-      </pc:sldChg>
-      <pc:sldChg chg="add del">
-        <pc:chgData name="Július Baráth" userId="e650c4ab-697e-4750-bd58-c1531aabce95" providerId="ADAL" clId="{224C7222-0FFC-4E4D-8F8F-67FF4A45E017}" dt="2020-01-20T10:53:48.682" v="15" actId="2696"/>
-        <pc:sldMkLst>
-          <pc:docMk/>
-          <pc:sldMk cId="1619174534" sldId="1138"/>
-        </pc:sldMkLst>
-      </pc:sldChg>
-      <pc:sldChg chg="add">
-        <pc:chgData name="Július Baráth" userId="e650c4ab-697e-4750-bd58-c1531aabce95" providerId="ADAL" clId="{224C7222-0FFC-4E4D-8F8F-67FF4A45E017}" dt="2020-01-20T10:51:14.245" v="0"/>
-        <pc:sldMkLst>
-          <pc:docMk/>
-          <pc:sldMk cId="937940204" sldId="1139"/>
-        </pc:sldMkLst>
-      </pc:sldChg>
-      <pc:sldMasterChg chg="delSldLayout">
-        <pc:chgData name="Július Baráth" userId="e650c4ab-697e-4750-bd58-c1531aabce95" providerId="ADAL" clId="{224C7222-0FFC-4E4D-8F8F-67FF4A45E017}" dt="2020-01-20T10:53:48.686" v="16" actId="2696"/>
-        <pc:sldMasterMkLst>
-          <pc:docMk/>
-          <pc:sldMasterMk cId="0" sldId="2147483700"/>
-        </pc:sldMasterMkLst>
-        <pc:sldLayoutChg chg="del">
-          <pc:chgData name="Július Baráth" userId="e650c4ab-697e-4750-bd58-c1531aabce95" providerId="ADAL" clId="{224C7222-0FFC-4E4D-8F8F-67FF4A45E017}" dt="2020-01-20T10:53:48.686" v="16" actId="2696"/>
-          <pc:sldLayoutMkLst>
-            <pc:docMk/>
-            <pc:sldMasterMk cId="0" sldId="2147483700"/>
-            <pc:sldLayoutMk cId="2257996623" sldId="2147484029"/>
-          </pc:sldLayoutMkLst>
-        </pc:sldLayoutChg>
-      </pc:sldMasterChg>
-    </pc:docChg>
-  </pc:docChgLst>
-  <pc:docChgLst>
-    <pc:chgData name="Baráth, Július" userId="aebde9b9-dccc-4475-a9ac-c05e78323d7a" providerId="ADAL" clId="{63132ABF-E993-C44D-915F-4EFE91262F55}"/>
-    <pc:docChg chg="modSld">
-      <pc:chgData name="Baráth, Július" userId="aebde9b9-dccc-4475-a9ac-c05e78323d7a" providerId="ADAL" clId="{63132ABF-E993-C44D-915F-4EFE91262F55}" dt="2025-03-05T09:31:45.803" v="1" actId="113"/>
-      <pc:docMkLst>
-        <pc:docMk/>
-      </pc:docMkLst>
-      <pc:sldChg chg="modSp mod">
-        <pc:chgData name="Baráth, Július" userId="aebde9b9-dccc-4475-a9ac-c05e78323d7a" providerId="ADAL" clId="{63132ABF-E993-C44D-915F-4EFE91262F55}" dt="2025-03-05T09:31:45.803" v="1" actId="113"/>
-        <pc:sldMkLst>
-          <pc:docMk/>
-          <pc:sldMk cId="2283387875" sldId="1112"/>
-        </pc:sldMkLst>
-        <pc:spChg chg="mod">
-          <ac:chgData name="Baráth, Július" userId="aebde9b9-dccc-4475-a9ac-c05e78323d7a" providerId="ADAL" clId="{63132ABF-E993-C44D-915F-4EFE91262F55}" dt="2025-03-05T09:31:45.803" v="1" actId="113"/>
+        <pc:spChg chg="add mod">
+          <ac:chgData name="Baráth, Július" userId="aebde9b9-dccc-4475-a9ac-c05e78323d7a" providerId="ADAL" clId="{4A0811C8-ED2F-505E-B787-C8270CED5046}" dt="2026-02-18T07:35:25.868" v="103" actId="1076"/>
           <ac:spMkLst>
             <pc:docMk/>
-            <pc:sldMk cId="2283387875" sldId="1112"/>
-            <ac:spMk id="4" creationId="{1F3CA7BB-7E7C-7149-9859-4AA0DDEC8CC4}"/>
+            <pc:sldMk cId="875630627" sldId="1107"/>
+            <ac:spMk id="2" creationId="{F76B0ADD-1514-E8C3-5BA3-BE6BD8B7F62B}"/>
           </ac:spMkLst>
         </pc:spChg>
-      </pc:sldChg>
-    </pc:docChg>
-  </pc:docChgLst>
-  <pc:docChgLst>
-    <pc:chgData name="Július Baráth" userId="e650c4ab-697e-4750-bd58-c1531aabce95" providerId="ADAL" clId="{A3D54BE7-A4A0-F541-A34B-9C7BC6316D37}"/>
-    <pc:docChg chg="modSld">
-      <pc:chgData name="Július Baráth" userId="e650c4ab-697e-4750-bd58-c1531aabce95" providerId="ADAL" clId="{A3D54BE7-A4A0-F541-A34B-9C7BC6316D37}" dt="2022-03-14T06:43:26.403" v="0" actId="113"/>
-      <pc:docMkLst>
-        <pc:docMk/>
-      </pc:docMkLst>
-      <pc:sldChg chg="modSp mod">
-        <pc:chgData name="Július Baráth" userId="e650c4ab-697e-4750-bd58-c1531aabce95" providerId="ADAL" clId="{A3D54BE7-A4A0-F541-A34B-9C7BC6316D37}" dt="2022-03-14T06:43:26.403" v="0" actId="113"/>
-        <pc:sldMkLst>
-          <pc:docMk/>
-          <pc:sldMk cId="1594353498" sldId="1099"/>
-        </pc:sldMkLst>
-      </pc:sldChg>
-    </pc:docChg>
-  </pc:docChgLst>
-  <pc:docChgLst>
-    <pc:chgData name="Baráth, Július" userId="aebde9b9-dccc-4475-a9ac-c05e78323d7a" providerId="ADAL" clId="{1CEEBEB2-B292-7147-93C8-8948D4D04987}"/>
-    <pc:docChg chg="modSld">
-      <pc:chgData name="Baráth, Július" userId="aebde9b9-dccc-4475-a9ac-c05e78323d7a" providerId="ADAL" clId="{1CEEBEB2-B292-7147-93C8-8948D4D04987}" dt="2024-02-19T17:48:44.139" v="3" actId="14100"/>
-      <pc:docMkLst>
-        <pc:docMk/>
-      </pc:docMkLst>
-      <pc:sldChg chg="addSp modSp">
-        <pc:chgData name="Baráth, Július" userId="aebde9b9-dccc-4475-a9ac-c05e78323d7a" providerId="ADAL" clId="{1CEEBEB2-B292-7147-93C8-8948D4D04987}" dt="2024-02-19T17:48:44.139" v="3" actId="14100"/>
-        <pc:sldMkLst>
-          <pc:docMk/>
-          <pc:sldMk cId="3014441826" sldId="1109"/>
-        </pc:sldMkLst>
-      </pc:sldChg>
-    </pc:docChg>
-  </pc:docChgLst>
-  <pc:docChgLst>
-    <pc:chgData name="Július Baráth" userId="e650c4ab-697e-4750-bd58-c1531aabce95" providerId="ADAL" clId="{4046092A-DB14-45C0-A200-4B28B4E4E625}"/>
-    <pc:docChg chg="custSel modSld">
-      <pc:chgData name="Július Baráth" userId="e650c4ab-697e-4750-bd58-c1531aabce95" providerId="ADAL" clId="{4046092A-DB14-45C0-A200-4B28B4E4E625}" dt="2021-02-18T09:20:33.376" v="105" actId="113"/>
-      <pc:docMkLst>
-        <pc:docMk/>
-      </pc:docMkLst>
-      <pc:sldChg chg="addSp modSp mod modNotesTx">
-        <pc:chgData name="Július Baráth" userId="e650c4ab-697e-4750-bd58-c1531aabce95" providerId="ADAL" clId="{4046092A-DB14-45C0-A200-4B28B4E4E625}" dt="2021-02-18T09:09:28.256" v="97" actId="20577"/>
-        <pc:sldMkLst>
-          <pc:docMk/>
-          <pc:sldMk cId="3014441826" sldId="1109"/>
-        </pc:sldMkLst>
-      </pc:sldChg>
-      <pc:sldChg chg="modSp mod">
-        <pc:chgData name="Július Baráth" userId="e650c4ab-697e-4750-bd58-c1531aabce95" providerId="ADAL" clId="{4046092A-DB14-45C0-A200-4B28B4E4E625}" dt="2021-02-18T09:13:59.785" v="100"/>
-        <pc:sldMkLst>
-          <pc:docMk/>
-          <pc:sldMk cId="1171550552" sldId="1111"/>
-        </pc:sldMkLst>
-      </pc:sldChg>
-      <pc:sldChg chg="modSp mod">
-        <pc:chgData name="Július Baráth" userId="e650c4ab-697e-4750-bd58-c1531aabce95" providerId="ADAL" clId="{4046092A-DB14-45C0-A200-4B28B4E4E625}" dt="2021-02-18T09:15:49.107" v="102" actId="113"/>
-        <pc:sldMkLst>
-          <pc:docMk/>
-          <pc:sldMk cId="1837327114" sldId="1114"/>
-        </pc:sldMkLst>
-      </pc:sldChg>
-      <pc:sldChg chg="modSp mod">
-        <pc:chgData name="Július Baráth" userId="e650c4ab-697e-4750-bd58-c1531aabce95" providerId="ADAL" clId="{4046092A-DB14-45C0-A200-4B28B4E4E625}" dt="2021-02-18T09:20:33.376" v="105" actId="113"/>
-        <pc:sldMkLst>
-          <pc:docMk/>
-          <pc:sldMk cId="20216327" sldId="1119"/>
-        </pc:sldMkLst>
-      </pc:sldChg>
-    </pc:docChg>
-  </pc:docChgLst>
-  <pc:docChgLst>
-    <pc:chgData name="Július Baráth" userId="e650c4ab-697e-4750-bd58-c1531aabce95" providerId="ADAL" clId="{82D776A6-C835-734F-A830-5B8D5EA28FB6}"/>
-    <pc:docChg chg="custSel modSld">
-      <pc:chgData name="Július Baráth" userId="e650c4ab-697e-4750-bd58-c1531aabce95" providerId="ADAL" clId="{82D776A6-C835-734F-A830-5B8D5EA28FB6}" dt="2020-03-02T08:21:05.412" v="2"/>
-      <pc:docMkLst>
-        <pc:docMk/>
-      </pc:docMkLst>
-      <pc:sldChg chg="modSp">
-        <pc:chgData name="Július Baráth" userId="e650c4ab-697e-4750-bd58-c1531aabce95" providerId="ADAL" clId="{82D776A6-C835-734F-A830-5B8D5EA28FB6}" dt="2020-03-02T08:09:11.422" v="0" actId="113"/>
-        <pc:sldMkLst>
-          <pc:docMk/>
-          <pc:sldMk cId="4106652241" sldId="1093"/>
-        </pc:sldMkLst>
-      </pc:sldChg>
-      <pc:sldChg chg="addSp modSp">
-        <pc:chgData name="Július Baráth" userId="e650c4ab-697e-4750-bd58-c1531aabce95" providerId="ADAL" clId="{82D776A6-C835-734F-A830-5B8D5EA28FB6}" dt="2020-03-02T08:21:05.412" v="2"/>
-        <pc:sldMkLst>
-          <pc:docMk/>
-          <pc:sldMk cId="3452850491" sldId="1110"/>
-        </pc:sldMkLst>
-      </pc:sldChg>
-      <pc:sldChg chg="modSp">
-        <pc:chgData name="Július Baráth" userId="e650c4ab-697e-4750-bd58-c1531aabce95" providerId="ADAL" clId="{82D776A6-C835-734F-A830-5B8D5EA28FB6}" dt="2020-03-02T08:20:32.404" v="1" actId="33524"/>
-        <pc:sldMkLst>
-          <pc:docMk/>
-          <pc:sldMk cId="3298082407" sldId="1130"/>
-        </pc:sldMkLst>
-      </pc:sldChg>
-    </pc:docChg>
-  </pc:docChgLst>
-  <pc:docChgLst>
-    <pc:chgData name="Július Baráth" userId="e650c4ab-697e-4750-bd58-c1531aabce95" providerId="ADAL" clId="{875DAC7F-5417-4972-8E3D-90101A19B3AF}"/>
-    <pc:docChg chg="modSld">
-      <pc:chgData name="Július Baráth" userId="e650c4ab-697e-4750-bd58-c1531aabce95" providerId="ADAL" clId="{875DAC7F-5417-4972-8E3D-90101A19B3AF}" dt="2021-02-19T09:19:20.113" v="2" actId="1076"/>
-      <pc:docMkLst>
-        <pc:docMk/>
-      </pc:docMkLst>
-      <pc:sldChg chg="modSp mod">
-        <pc:chgData name="Július Baráth" userId="e650c4ab-697e-4750-bd58-c1531aabce95" providerId="ADAL" clId="{875DAC7F-5417-4972-8E3D-90101A19B3AF}" dt="2021-02-19T09:19:20.113" v="2" actId="1076"/>
-        <pc:sldMkLst>
-          <pc:docMk/>
-          <pc:sldMk cId="3014441826" sldId="1109"/>
-        </pc:sldMkLst>
       </pc:sldChg>
     </pc:docChg>
   </pc:docChgLst>
@@ -799,7 +444,7 @@
           <a:p>
             <a:fld id="{136337D9-3022-3D41-8D8A-BDF2F3B0DD8E}" type="datetimeFigureOut">
               <a:rPr lang="en-US" smtClean="0"/>
-              <a:t>3/5/25</a:t>
+              <a:t>2/18/26</a:t>
             </a:fld>
             <a:endParaRPr lang="en-US" dirty="0"/>
           </a:p>
@@ -30220,7 +29865,9 @@
           </a:xfrm>
         </p:spPr>
         <p:txBody>
-          <a:bodyPr/>
+          <a:bodyPr>
+            <a:normAutofit fontScale="70000" lnSpcReduction="20000"/>
+          </a:bodyPr>
           <a:lstStyle/>
           <a:p>
             <a:pPr marL="0" indent="0" algn="l"/>
@@ -30317,47 +29964,1043 @@
             </a:r>
           </a:p>
           <a:p>
-            <a:pPr marL="415985" lvl="1" indent="-342900">
+            <a:pPr marL="342900" indent="-342900" algn="l">
               <a:buFont typeface="Arial" panose="020B0604020202020204" pitchFamily="34" charset="0"/>
               <a:buChar char="•"/>
             </a:pPr>
             <a:r>
-              <a:rPr lang="en-US" sz="1600" dirty="0">
+              <a:rPr lang="sk-SK" dirty="0">
                 <a:solidFill>
                   <a:srgbClr val="000000"/>
                 </a:solidFill>
               </a:rPr>
-              <a:t>When transmitting, devices also </a:t>
-            </a:r>
-            <a:r>
-              <a:rPr lang="en-US" sz="1600" b="1" dirty="0">
+              <a:t>RTS/CTS (</a:t>
+            </a:r>
+            <a:r>
+              <a:rPr lang="sk-SK" dirty="0" err="1">
                 <a:solidFill>
                   <a:srgbClr val="000000"/>
                 </a:solidFill>
               </a:rPr>
-              <a:t>include the time duration </a:t>
-            </a:r>
-            <a:r>
-              <a:rPr lang="en-US" sz="1600" dirty="0">
+              <a:t>Request</a:t>
+            </a:r>
+            <a:r>
+              <a:rPr lang="sk-SK" dirty="0">
                 <a:solidFill>
                   <a:srgbClr val="000000"/>
                 </a:solidFill>
               </a:rPr>
-              <a:t>needed for the transmission.</a:t>
-            </a:r>
-          </a:p>
-          <a:p>
-            <a:pPr marL="415985" lvl="1" indent="-342900">
+              <a:t> to </a:t>
+            </a:r>
+            <a:r>
+              <a:rPr lang="sk-SK" dirty="0" err="1">
+                <a:solidFill>
+                  <a:srgbClr val="000000"/>
+                </a:solidFill>
+              </a:rPr>
+              <a:t>Send</a:t>
+            </a:r>
+            <a:r>
+              <a:rPr lang="sk-SK" dirty="0">
+                <a:solidFill>
+                  <a:srgbClr val="000000"/>
+                </a:solidFill>
+              </a:rPr>
+              <a:t> / </a:t>
+            </a:r>
+            <a:r>
+              <a:rPr lang="sk-SK" dirty="0" err="1">
+                <a:solidFill>
+                  <a:srgbClr val="000000"/>
+                </a:solidFill>
+              </a:rPr>
+              <a:t>Clear</a:t>
+            </a:r>
+            <a:r>
+              <a:rPr lang="sk-SK" dirty="0">
+                <a:solidFill>
+                  <a:srgbClr val="000000"/>
+                </a:solidFill>
+              </a:rPr>
+              <a:t> to </a:t>
+            </a:r>
+            <a:r>
+              <a:rPr lang="sk-SK" dirty="0" err="1">
+                <a:solidFill>
+                  <a:srgbClr val="000000"/>
+                </a:solidFill>
+              </a:rPr>
+              <a:t>Send</a:t>
+            </a:r>
+            <a:r>
+              <a:rPr lang="sk-SK" dirty="0">
+                <a:solidFill>
+                  <a:srgbClr val="000000"/>
+                </a:solidFill>
+              </a:rPr>
+              <a:t>) </a:t>
+            </a:r>
+            <a:r>
+              <a:rPr lang="sk-SK" dirty="0" err="1">
+                <a:solidFill>
+                  <a:srgbClr val="000000"/>
+                </a:solidFill>
+              </a:rPr>
+              <a:t>works</a:t>
+            </a:r>
+            <a:r>
+              <a:rPr lang="sk-SK" dirty="0">
+                <a:solidFill>
+                  <a:srgbClr val="000000"/>
+                </a:solidFill>
+              </a:rPr>
+              <a:t> as a </a:t>
+            </a:r>
+            <a:r>
+              <a:rPr lang="sk-SK" dirty="0" err="1">
+                <a:solidFill>
+                  <a:srgbClr val="000000"/>
+                </a:solidFill>
+              </a:rPr>
+              <a:t>preventive</a:t>
+            </a:r>
+            <a:r>
+              <a:rPr lang="sk-SK" dirty="0">
+                <a:solidFill>
+                  <a:srgbClr val="000000"/>
+                </a:solidFill>
+              </a:rPr>
+              <a:t> </a:t>
+            </a:r>
+            <a:r>
+              <a:rPr lang="sk-SK" dirty="0" err="1">
+                <a:solidFill>
+                  <a:srgbClr val="000000"/>
+                </a:solidFill>
+              </a:rPr>
+              <a:t>mechanism</a:t>
+            </a:r>
+            <a:r>
+              <a:rPr lang="sk-SK" dirty="0">
+                <a:solidFill>
+                  <a:srgbClr val="000000"/>
+                </a:solidFill>
+              </a:rPr>
+              <a:t> to </a:t>
+            </a:r>
+            <a:r>
+              <a:rPr lang="sk-SK" dirty="0" err="1">
+                <a:solidFill>
+                  <a:srgbClr val="000000"/>
+                </a:solidFill>
+              </a:rPr>
+              <a:t>reduce</a:t>
+            </a:r>
+            <a:r>
+              <a:rPr lang="sk-SK" dirty="0">
+                <a:solidFill>
+                  <a:srgbClr val="000000"/>
+                </a:solidFill>
+              </a:rPr>
+              <a:t> </a:t>
+            </a:r>
+            <a:r>
+              <a:rPr lang="sk-SK" dirty="0" err="1">
+                <a:solidFill>
+                  <a:srgbClr val="000000"/>
+                </a:solidFill>
+              </a:rPr>
+              <a:t>the</a:t>
+            </a:r>
+            <a:r>
+              <a:rPr lang="sk-SK" dirty="0">
+                <a:solidFill>
+                  <a:srgbClr val="000000"/>
+                </a:solidFill>
+              </a:rPr>
+              <a:t> </a:t>
+            </a:r>
+            <a:r>
+              <a:rPr lang="sk-SK" dirty="0" err="1">
+                <a:solidFill>
+                  <a:srgbClr val="000000"/>
+                </a:solidFill>
+              </a:rPr>
+              <a:t>likelihood</a:t>
+            </a:r>
+            <a:r>
+              <a:rPr lang="sk-SK" dirty="0">
+                <a:solidFill>
+                  <a:srgbClr val="000000"/>
+                </a:solidFill>
+              </a:rPr>
+              <a:t> of </a:t>
+            </a:r>
+            <a:r>
+              <a:rPr lang="sk-SK" dirty="0" err="1">
+                <a:solidFill>
+                  <a:srgbClr val="000000"/>
+                </a:solidFill>
+              </a:rPr>
+              <a:t>collisions</a:t>
+            </a:r>
+            <a:r>
+              <a:rPr lang="sk-SK" dirty="0">
+                <a:solidFill>
+                  <a:srgbClr val="000000"/>
+                </a:solidFill>
+              </a:rPr>
+              <a:t> in a </a:t>
+            </a:r>
+            <a:r>
+              <a:rPr lang="sk-SK" dirty="0" err="1">
+                <a:solidFill>
+                  <a:srgbClr val="000000"/>
+                </a:solidFill>
+              </a:rPr>
+              <a:t>wireless</a:t>
+            </a:r>
+            <a:r>
+              <a:rPr lang="sk-SK" dirty="0">
+                <a:solidFill>
+                  <a:srgbClr val="000000"/>
+                </a:solidFill>
+              </a:rPr>
+              <a:t> </a:t>
+            </a:r>
+            <a:r>
+              <a:rPr lang="sk-SK" dirty="0" err="1">
+                <a:solidFill>
+                  <a:srgbClr val="000000"/>
+                </a:solidFill>
+              </a:rPr>
+              <a:t>network</a:t>
+            </a:r>
+            <a:r>
+              <a:rPr lang="sk-SK" dirty="0">
+                <a:solidFill>
+                  <a:srgbClr val="000000"/>
+                </a:solidFill>
+              </a:rPr>
+              <a:t>.</a:t>
+            </a:r>
+          </a:p>
+          <a:p>
+            <a:pPr marL="342900" indent="-342900" algn="l">
               <a:buFont typeface="Arial" panose="020B0604020202020204" pitchFamily="34" charset="0"/>
               <a:buChar char="•"/>
             </a:pPr>
             <a:r>
-              <a:rPr lang="en-US" sz="1600" dirty="0">
+              <a:rPr lang="sk-SK" dirty="0" err="1">
                 <a:solidFill>
                   <a:srgbClr val="000000"/>
                 </a:solidFill>
               </a:rPr>
-              <a:t>Other devices on the shared medium receive the time duration information and know how long the medium will be unavailable.</a:t>
+              <a:t>When</a:t>
+            </a:r>
+            <a:r>
+              <a:rPr lang="sk-SK" dirty="0">
+                <a:solidFill>
+                  <a:srgbClr val="000000"/>
+                </a:solidFill>
+              </a:rPr>
+              <a:t> a device </a:t>
+            </a:r>
+            <a:r>
+              <a:rPr lang="sk-SK" dirty="0" err="1">
+                <a:solidFill>
+                  <a:srgbClr val="000000"/>
+                </a:solidFill>
+              </a:rPr>
+              <a:t>wants</a:t>
+            </a:r>
+            <a:r>
+              <a:rPr lang="sk-SK" dirty="0">
+                <a:solidFill>
+                  <a:srgbClr val="000000"/>
+                </a:solidFill>
+              </a:rPr>
+              <a:t> to </a:t>
+            </a:r>
+            <a:r>
+              <a:rPr lang="sk-SK" dirty="0" err="1">
+                <a:solidFill>
+                  <a:srgbClr val="000000"/>
+                </a:solidFill>
+              </a:rPr>
+              <a:t>send</a:t>
+            </a:r>
+            <a:r>
+              <a:rPr lang="sk-SK" dirty="0">
+                <a:solidFill>
+                  <a:srgbClr val="000000"/>
+                </a:solidFill>
+              </a:rPr>
+              <a:t> </a:t>
+            </a:r>
+            <a:r>
+              <a:rPr lang="sk-SK" dirty="0" err="1">
+                <a:solidFill>
+                  <a:srgbClr val="000000"/>
+                </a:solidFill>
+              </a:rPr>
+              <a:t>data</a:t>
+            </a:r>
+            <a:r>
+              <a:rPr lang="sk-SK" dirty="0">
+                <a:solidFill>
+                  <a:srgbClr val="000000"/>
+                </a:solidFill>
+              </a:rPr>
+              <a:t>, </a:t>
+            </a:r>
+            <a:r>
+              <a:rPr lang="sk-SK" dirty="0" err="1">
+                <a:solidFill>
+                  <a:srgbClr val="000000"/>
+                </a:solidFill>
+              </a:rPr>
+              <a:t>it</a:t>
+            </a:r>
+            <a:r>
+              <a:rPr lang="sk-SK" dirty="0">
+                <a:solidFill>
+                  <a:srgbClr val="000000"/>
+                </a:solidFill>
+              </a:rPr>
+              <a:t> </a:t>
+            </a:r>
+            <a:r>
+              <a:rPr lang="sk-SK" dirty="0" err="1">
+                <a:solidFill>
+                  <a:srgbClr val="000000"/>
+                </a:solidFill>
+              </a:rPr>
+              <a:t>first</a:t>
+            </a:r>
+            <a:r>
+              <a:rPr lang="sk-SK" dirty="0">
+                <a:solidFill>
+                  <a:srgbClr val="000000"/>
+                </a:solidFill>
+              </a:rPr>
+              <a:t> </a:t>
+            </a:r>
+            <a:r>
+              <a:rPr lang="sk-SK" dirty="0" err="1">
+                <a:solidFill>
+                  <a:srgbClr val="000000"/>
+                </a:solidFill>
+              </a:rPr>
+              <a:t>sends</a:t>
+            </a:r>
+            <a:r>
+              <a:rPr lang="sk-SK" dirty="0">
+                <a:solidFill>
+                  <a:srgbClr val="000000"/>
+                </a:solidFill>
+              </a:rPr>
+              <a:t> a </a:t>
+            </a:r>
+            <a:r>
+              <a:rPr lang="sk-SK" dirty="0" err="1">
+                <a:solidFill>
+                  <a:srgbClr val="000000"/>
+                </a:solidFill>
+              </a:rPr>
+              <a:t>short</a:t>
+            </a:r>
+            <a:r>
+              <a:rPr lang="sk-SK" dirty="0">
+                <a:solidFill>
+                  <a:srgbClr val="000000"/>
+                </a:solidFill>
+              </a:rPr>
+              <a:t> RTS </a:t>
+            </a:r>
+            <a:r>
+              <a:rPr lang="sk-SK" dirty="0" err="1">
+                <a:solidFill>
+                  <a:srgbClr val="000000"/>
+                </a:solidFill>
+              </a:rPr>
+              <a:t>message</a:t>
+            </a:r>
+            <a:r>
+              <a:rPr lang="sk-SK" dirty="0">
+                <a:solidFill>
+                  <a:srgbClr val="000000"/>
+                </a:solidFill>
+              </a:rPr>
+              <a:t> </a:t>
+            </a:r>
+            <a:r>
+              <a:rPr lang="sk-SK" dirty="0" err="1">
+                <a:solidFill>
+                  <a:srgbClr val="000000"/>
+                </a:solidFill>
+              </a:rPr>
+              <a:t>requesting</a:t>
+            </a:r>
+            <a:r>
+              <a:rPr lang="sk-SK" dirty="0">
+                <a:solidFill>
+                  <a:srgbClr val="000000"/>
+                </a:solidFill>
+              </a:rPr>
+              <a:t> </a:t>
+            </a:r>
+            <a:r>
+              <a:rPr lang="sk-SK" dirty="0" err="1">
+                <a:solidFill>
+                  <a:srgbClr val="000000"/>
+                </a:solidFill>
+              </a:rPr>
+              <a:t>permission</a:t>
+            </a:r>
+            <a:r>
+              <a:rPr lang="sk-SK" dirty="0">
+                <a:solidFill>
+                  <a:srgbClr val="000000"/>
+                </a:solidFill>
+              </a:rPr>
+              <a:t> to </a:t>
+            </a:r>
+            <a:r>
+              <a:rPr lang="sk-SK" dirty="0" err="1">
+                <a:solidFill>
+                  <a:srgbClr val="000000"/>
+                </a:solidFill>
+              </a:rPr>
+              <a:t>use</a:t>
+            </a:r>
+            <a:r>
+              <a:rPr lang="sk-SK" dirty="0">
+                <a:solidFill>
+                  <a:srgbClr val="000000"/>
+                </a:solidFill>
+              </a:rPr>
+              <a:t> </a:t>
+            </a:r>
+            <a:r>
+              <a:rPr lang="sk-SK" dirty="0" err="1">
+                <a:solidFill>
+                  <a:srgbClr val="000000"/>
+                </a:solidFill>
+              </a:rPr>
+              <a:t>the</a:t>
+            </a:r>
+            <a:r>
+              <a:rPr lang="sk-SK" dirty="0">
+                <a:solidFill>
+                  <a:srgbClr val="000000"/>
+                </a:solidFill>
+              </a:rPr>
+              <a:t> </a:t>
+            </a:r>
+            <a:r>
+              <a:rPr lang="sk-SK" dirty="0" err="1">
+                <a:solidFill>
+                  <a:srgbClr val="000000"/>
+                </a:solidFill>
+              </a:rPr>
+              <a:t>medium</a:t>
+            </a:r>
+            <a:r>
+              <a:rPr lang="sk-SK" dirty="0">
+                <a:solidFill>
+                  <a:srgbClr val="000000"/>
+                </a:solidFill>
+              </a:rPr>
+              <a:t>.</a:t>
+            </a:r>
+          </a:p>
+          <a:p>
+            <a:pPr marL="342900" indent="-342900" algn="l">
+              <a:buFont typeface="Arial" panose="020B0604020202020204" pitchFamily="34" charset="0"/>
+              <a:buChar char="•"/>
+            </a:pPr>
+            <a:r>
+              <a:rPr lang="sk-SK" dirty="0" err="1">
+                <a:solidFill>
+                  <a:srgbClr val="000000"/>
+                </a:solidFill>
+              </a:rPr>
+              <a:t>The</a:t>
+            </a:r>
+            <a:r>
+              <a:rPr lang="sk-SK" dirty="0">
+                <a:solidFill>
+                  <a:srgbClr val="000000"/>
+                </a:solidFill>
+              </a:rPr>
+              <a:t> </a:t>
+            </a:r>
+            <a:r>
+              <a:rPr lang="sk-SK" dirty="0" err="1">
+                <a:solidFill>
+                  <a:srgbClr val="000000"/>
+                </a:solidFill>
+              </a:rPr>
+              <a:t>receiving</a:t>
+            </a:r>
+            <a:r>
+              <a:rPr lang="sk-SK" dirty="0">
+                <a:solidFill>
+                  <a:srgbClr val="000000"/>
+                </a:solidFill>
+              </a:rPr>
+              <a:t> device </a:t>
+            </a:r>
+            <a:r>
+              <a:rPr lang="sk-SK" dirty="0" err="1">
+                <a:solidFill>
+                  <a:srgbClr val="000000"/>
+                </a:solidFill>
+              </a:rPr>
+              <a:t>replies</a:t>
+            </a:r>
+            <a:r>
+              <a:rPr lang="sk-SK" dirty="0">
+                <a:solidFill>
+                  <a:srgbClr val="000000"/>
+                </a:solidFill>
+              </a:rPr>
+              <a:t> </a:t>
+            </a:r>
+            <a:r>
+              <a:rPr lang="sk-SK" dirty="0" err="1">
+                <a:solidFill>
+                  <a:srgbClr val="000000"/>
+                </a:solidFill>
+              </a:rPr>
+              <a:t>with</a:t>
+            </a:r>
+            <a:r>
+              <a:rPr lang="sk-SK" dirty="0">
+                <a:solidFill>
+                  <a:srgbClr val="000000"/>
+                </a:solidFill>
+              </a:rPr>
+              <a:t> a CTS </a:t>
+            </a:r>
+            <a:r>
+              <a:rPr lang="sk-SK" dirty="0" err="1">
+                <a:solidFill>
+                  <a:srgbClr val="000000"/>
+                </a:solidFill>
+              </a:rPr>
+              <a:t>message</a:t>
+            </a:r>
+            <a:r>
+              <a:rPr lang="sk-SK" dirty="0">
+                <a:solidFill>
+                  <a:srgbClr val="000000"/>
+                </a:solidFill>
+              </a:rPr>
+              <a:t>, </a:t>
+            </a:r>
+            <a:r>
+              <a:rPr lang="sk-SK" dirty="0" err="1">
+                <a:solidFill>
+                  <a:srgbClr val="000000"/>
+                </a:solidFill>
+              </a:rPr>
+              <a:t>informing</a:t>
+            </a:r>
+            <a:r>
+              <a:rPr lang="sk-SK" dirty="0">
+                <a:solidFill>
+                  <a:srgbClr val="000000"/>
+                </a:solidFill>
+              </a:rPr>
+              <a:t> </a:t>
+            </a:r>
+            <a:r>
+              <a:rPr lang="sk-SK" dirty="0" err="1">
+                <a:solidFill>
+                  <a:srgbClr val="000000"/>
+                </a:solidFill>
+              </a:rPr>
+              <a:t>all</a:t>
+            </a:r>
+            <a:r>
+              <a:rPr lang="sk-SK" dirty="0">
+                <a:solidFill>
+                  <a:srgbClr val="000000"/>
+                </a:solidFill>
+              </a:rPr>
+              <a:t> </a:t>
+            </a:r>
+            <a:r>
+              <a:rPr lang="sk-SK" dirty="0" err="1">
+                <a:solidFill>
+                  <a:srgbClr val="000000"/>
+                </a:solidFill>
+              </a:rPr>
+              <a:t>nearby</a:t>
+            </a:r>
+            <a:r>
+              <a:rPr lang="sk-SK" dirty="0">
+                <a:solidFill>
+                  <a:srgbClr val="000000"/>
+                </a:solidFill>
+              </a:rPr>
+              <a:t> </a:t>
+            </a:r>
+            <a:r>
+              <a:rPr lang="sk-SK" dirty="0" err="1">
+                <a:solidFill>
+                  <a:srgbClr val="000000"/>
+                </a:solidFill>
+              </a:rPr>
+              <a:t>nodes</a:t>
+            </a:r>
+            <a:r>
+              <a:rPr lang="sk-SK" dirty="0">
+                <a:solidFill>
+                  <a:srgbClr val="000000"/>
+                </a:solidFill>
+              </a:rPr>
+              <a:t> </a:t>
+            </a:r>
+            <a:r>
+              <a:rPr lang="sk-SK" dirty="0" err="1">
+                <a:solidFill>
+                  <a:srgbClr val="000000"/>
+                </a:solidFill>
+              </a:rPr>
+              <a:t>that</a:t>
+            </a:r>
+            <a:r>
+              <a:rPr lang="sk-SK" dirty="0">
+                <a:solidFill>
+                  <a:srgbClr val="000000"/>
+                </a:solidFill>
+              </a:rPr>
+              <a:t> </a:t>
+            </a:r>
+            <a:r>
+              <a:rPr lang="sk-SK" dirty="0" err="1">
+                <a:solidFill>
+                  <a:srgbClr val="000000"/>
+                </a:solidFill>
+              </a:rPr>
+              <a:t>the</a:t>
+            </a:r>
+            <a:r>
+              <a:rPr lang="sk-SK" dirty="0">
+                <a:solidFill>
+                  <a:srgbClr val="000000"/>
+                </a:solidFill>
+              </a:rPr>
+              <a:t> </a:t>
+            </a:r>
+            <a:r>
+              <a:rPr lang="sk-SK" dirty="0" err="1">
+                <a:solidFill>
+                  <a:srgbClr val="000000"/>
+                </a:solidFill>
+              </a:rPr>
+              <a:t>medium</a:t>
+            </a:r>
+            <a:r>
+              <a:rPr lang="sk-SK" dirty="0">
+                <a:solidFill>
+                  <a:srgbClr val="000000"/>
+                </a:solidFill>
+              </a:rPr>
+              <a:t> </a:t>
+            </a:r>
+            <a:r>
+              <a:rPr lang="sk-SK" dirty="0" err="1">
+                <a:solidFill>
+                  <a:srgbClr val="000000"/>
+                </a:solidFill>
+              </a:rPr>
+              <a:t>is</a:t>
+            </a:r>
+            <a:r>
+              <a:rPr lang="sk-SK" dirty="0">
+                <a:solidFill>
+                  <a:srgbClr val="000000"/>
+                </a:solidFill>
+              </a:rPr>
+              <a:t> </a:t>
+            </a:r>
+            <a:r>
+              <a:rPr lang="sk-SK" dirty="0" err="1">
+                <a:solidFill>
+                  <a:srgbClr val="000000"/>
+                </a:solidFill>
+              </a:rPr>
+              <a:t>reserved</a:t>
+            </a:r>
+            <a:r>
+              <a:rPr lang="sk-SK" dirty="0">
+                <a:solidFill>
+                  <a:srgbClr val="000000"/>
+                </a:solidFill>
+              </a:rPr>
+              <a:t> </a:t>
+            </a:r>
+            <a:r>
+              <a:rPr lang="sk-SK" dirty="0" err="1">
+                <a:solidFill>
+                  <a:srgbClr val="000000"/>
+                </a:solidFill>
+              </a:rPr>
+              <a:t>for</a:t>
+            </a:r>
+            <a:r>
+              <a:rPr lang="sk-SK" dirty="0">
+                <a:solidFill>
+                  <a:srgbClr val="000000"/>
+                </a:solidFill>
+              </a:rPr>
+              <a:t> </a:t>
+            </a:r>
+            <a:r>
+              <a:rPr lang="sk-SK" dirty="0" err="1">
+                <a:solidFill>
+                  <a:srgbClr val="000000"/>
+                </a:solidFill>
+              </a:rPr>
+              <a:t>communication</a:t>
+            </a:r>
+            <a:r>
+              <a:rPr lang="sk-SK" dirty="0">
+                <a:solidFill>
+                  <a:srgbClr val="000000"/>
+                </a:solidFill>
+              </a:rPr>
+              <a:t>.</a:t>
+            </a:r>
+          </a:p>
+          <a:p>
+            <a:pPr marL="342900" indent="-342900" algn="l">
+              <a:buFont typeface="Arial" panose="020B0604020202020204" pitchFamily="34" charset="0"/>
+              <a:buChar char="•"/>
+            </a:pPr>
+            <a:r>
+              <a:rPr lang="sk-SK" dirty="0" err="1">
+                <a:solidFill>
+                  <a:srgbClr val="000000"/>
+                </a:solidFill>
+              </a:rPr>
+              <a:t>Other</a:t>
+            </a:r>
+            <a:r>
+              <a:rPr lang="sk-SK" dirty="0">
+                <a:solidFill>
+                  <a:srgbClr val="000000"/>
+                </a:solidFill>
+              </a:rPr>
+              <a:t> </a:t>
+            </a:r>
+            <a:r>
+              <a:rPr lang="sk-SK" dirty="0" err="1">
+                <a:solidFill>
+                  <a:srgbClr val="000000"/>
+                </a:solidFill>
+              </a:rPr>
+              <a:t>stations</a:t>
+            </a:r>
+            <a:r>
+              <a:rPr lang="sk-SK" dirty="0">
+                <a:solidFill>
+                  <a:srgbClr val="000000"/>
+                </a:solidFill>
+              </a:rPr>
+              <a:t> </a:t>
+            </a:r>
+            <a:r>
+              <a:rPr lang="sk-SK" dirty="0" err="1">
+                <a:solidFill>
+                  <a:srgbClr val="000000"/>
+                </a:solidFill>
+              </a:rPr>
+              <a:t>that</a:t>
+            </a:r>
+            <a:r>
+              <a:rPr lang="sk-SK" dirty="0">
+                <a:solidFill>
+                  <a:srgbClr val="000000"/>
+                </a:solidFill>
+              </a:rPr>
+              <a:t> </a:t>
+            </a:r>
+            <a:r>
+              <a:rPr lang="sk-SK" dirty="0" err="1">
+                <a:solidFill>
+                  <a:srgbClr val="000000"/>
+                </a:solidFill>
+              </a:rPr>
+              <a:t>receive</a:t>
+            </a:r>
+            <a:r>
+              <a:rPr lang="sk-SK" dirty="0">
+                <a:solidFill>
+                  <a:srgbClr val="000000"/>
+                </a:solidFill>
+              </a:rPr>
+              <a:t> </a:t>
+            </a:r>
+            <a:r>
+              <a:rPr lang="sk-SK" dirty="0" err="1">
+                <a:solidFill>
+                  <a:srgbClr val="000000"/>
+                </a:solidFill>
+              </a:rPr>
+              <a:t>the</a:t>
+            </a:r>
+            <a:r>
+              <a:rPr lang="sk-SK" dirty="0">
+                <a:solidFill>
+                  <a:srgbClr val="000000"/>
+                </a:solidFill>
+              </a:rPr>
+              <a:t> CTS </a:t>
+            </a:r>
+            <a:r>
+              <a:rPr lang="sk-SK" dirty="0" err="1">
+                <a:solidFill>
+                  <a:srgbClr val="000000"/>
+                </a:solidFill>
+              </a:rPr>
+              <a:t>message</a:t>
+            </a:r>
+            <a:r>
+              <a:rPr lang="sk-SK" dirty="0">
+                <a:solidFill>
+                  <a:srgbClr val="000000"/>
+                </a:solidFill>
+              </a:rPr>
+              <a:t> </a:t>
+            </a:r>
+            <a:r>
+              <a:rPr lang="sk-SK" dirty="0" err="1">
+                <a:solidFill>
+                  <a:srgbClr val="000000"/>
+                </a:solidFill>
+              </a:rPr>
+              <a:t>pause</a:t>
+            </a:r>
+            <a:r>
+              <a:rPr lang="sk-SK" dirty="0">
+                <a:solidFill>
+                  <a:srgbClr val="000000"/>
+                </a:solidFill>
+              </a:rPr>
+              <a:t> </a:t>
+            </a:r>
+            <a:r>
+              <a:rPr lang="sk-SK" dirty="0" err="1">
+                <a:solidFill>
+                  <a:srgbClr val="000000"/>
+                </a:solidFill>
+              </a:rPr>
+              <a:t>their</a:t>
+            </a:r>
+            <a:r>
+              <a:rPr lang="sk-SK" dirty="0">
+                <a:solidFill>
+                  <a:srgbClr val="000000"/>
+                </a:solidFill>
+              </a:rPr>
+              <a:t> </a:t>
+            </a:r>
+            <a:r>
+              <a:rPr lang="sk-SK" dirty="0" err="1">
+                <a:solidFill>
+                  <a:srgbClr val="000000"/>
+                </a:solidFill>
+              </a:rPr>
+              <a:t>transmissions</a:t>
+            </a:r>
+            <a:r>
+              <a:rPr lang="sk-SK" dirty="0">
+                <a:solidFill>
+                  <a:srgbClr val="000000"/>
+                </a:solidFill>
+              </a:rPr>
+              <a:t> </a:t>
+            </a:r>
+            <a:r>
+              <a:rPr lang="sk-SK" dirty="0" err="1">
+                <a:solidFill>
+                  <a:srgbClr val="000000"/>
+                </a:solidFill>
+              </a:rPr>
+              <a:t>for</a:t>
+            </a:r>
+            <a:r>
+              <a:rPr lang="sk-SK" dirty="0">
+                <a:solidFill>
+                  <a:srgbClr val="000000"/>
+                </a:solidFill>
+              </a:rPr>
+              <a:t> </a:t>
+            </a:r>
+            <a:r>
+              <a:rPr lang="sk-SK" dirty="0" err="1">
+                <a:solidFill>
+                  <a:srgbClr val="000000"/>
+                </a:solidFill>
+              </a:rPr>
+              <a:t>the</a:t>
+            </a:r>
+            <a:r>
+              <a:rPr lang="sk-SK" dirty="0">
+                <a:solidFill>
+                  <a:srgbClr val="000000"/>
+                </a:solidFill>
+              </a:rPr>
+              <a:t> </a:t>
+            </a:r>
+            <a:r>
+              <a:rPr lang="sk-SK" dirty="0" err="1">
+                <a:solidFill>
+                  <a:srgbClr val="000000"/>
+                </a:solidFill>
+              </a:rPr>
+              <a:t>specified</a:t>
+            </a:r>
+            <a:r>
+              <a:rPr lang="sk-SK" dirty="0">
+                <a:solidFill>
+                  <a:srgbClr val="000000"/>
+                </a:solidFill>
+              </a:rPr>
+              <a:t> </a:t>
+            </a:r>
+            <a:r>
+              <a:rPr lang="sk-SK" dirty="0" err="1">
+                <a:solidFill>
+                  <a:srgbClr val="000000"/>
+                </a:solidFill>
+              </a:rPr>
+              <a:t>duration</a:t>
+            </a:r>
+            <a:r>
+              <a:rPr lang="sk-SK" dirty="0">
+                <a:solidFill>
+                  <a:srgbClr val="000000"/>
+                </a:solidFill>
+              </a:rPr>
+              <a:t>, </a:t>
+            </a:r>
+            <a:r>
+              <a:rPr lang="sk-SK" dirty="0" err="1">
+                <a:solidFill>
+                  <a:srgbClr val="000000"/>
+                </a:solidFill>
+              </a:rPr>
+              <a:t>greatly</a:t>
+            </a:r>
+            <a:r>
+              <a:rPr lang="sk-SK" dirty="0">
+                <a:solidFill>
+                  <a:srgbClr val="000000"/>
+                </a:solidFill>
+              </a:rPr>
+              <a:t> </a:t>
+            </a:r>
+            <a:r>
+              <a:rPr lang="sk-SK" dirty="0" err="1">
+                <a:solidFill>
+                  <a:srgbClr val="000000"/>
+                </a:solidFill>
+              </a:rPr>
+              <a:t>reducing</a:t>
+            </a:r>
+            <a:r>
+              <a:rPr lang="sk-SK" dirty="0">
+                <a:solidFill>
+                  <a:srgbClr val="000000"/>
+                </a:solidFill>
+              </a:rPr>
+              <a:t> </a:t>
+            </a:r>
+            <a:r>
+              <a:rPr lang="sk-SK" dirty="0" err="1">
+                <a:solidFill>
+                  <a:srgbClr val="000000"/>
+                </a:solidFill>
+              </a:rPr>
+              <a:t>the</a:t>
+            </a:r>
+            <a:r>
+              <a:rPr lang="sk-SK" dirty="0">
+                <a:solidFill>
+                  <a:srgbClr val="000000"/>
+                </a:solidFill>
+              </a:rPr>
+              <a:t> </a:t>
+            </a:r>
+            <a:r>
+              <a:rPr lang="sk-SK" dirty="0" err="1">
+                <a:solidFill>
+                  <a:srgbClr val="000000"/>
+                </a:solidFill>
+              </a:rPr>
+              <a:t>chance</a:t>
+            </a:r>
+            <a:r>
+              <a:rPr lang="sk-SK" dirty="0">
+                <a:solidFill>
+                  <a:srgbClr val="000000"/>
+                </a:solidFill>
+              </a:rPr>
+              <a:t> of </a:t>
+            </a:r>
+            <a:r>
+              <a:rPr lang="sk-SK" dirty="0" err="1">
+                <a:solidFill>
+                  <a:srgbClr val="000000"/>
+                </a:solidFill>
+              </a:rPr>
+              <a:t>collision</a:t>
+            </a:r>
+            <a:r>
+              <a:rPr lang="sk-SK" dirty="0">
+                <a:solidFill>
+                  <a:srgbClr val="000000"/>
+                </a:solidFill>
+              </a:rPr>
+              <a:t> </a:t>
+            </a:r>
+            <a:r>
+              <a:rPr lang="sk-SK" dirty="0" err="1">
+                <a:solidFill>
+                  <a:srgbClr val="000000"/>
+                </a:solidFill>
+              </a:rPr>
+              <a:t>during</a:t>
+            </a:r>
+            <a:r>
+              <a:rPr lang="sk-SK" dirty="0">
+                <a:solidFill>
+                  <a:srgbClr val="000000"/>
+                </a:solidFill>
+              </a:rPr>
+              <a:t> </a:t>
+            </a:r>
+            <a:r>
+              <a:rPr lang="sk-SK" dirty="0" err="1">
+                <a:solidFill>
+                  <a:srgbClr val="000000"/>
+                </a:solidFill>
+              </a:rPr>
+              <a:t>data</a:t>
+            </a:r>
+            <a:r>
+              <a:rPr lang="sk-SK" dirty="0">
+                <a:solidFill>
+                  <a:srgbClr val="000000"/>
+                </a:solidFill>
+              </a:rPr>
+              <a:t> transfer.</a:t>
             </a:r>
           </a:p>
           <a:p>
@@ -30380,41 +31023,10 @@
             </a:endParaRPr>
           </a:p>
           <a:p>
-            <a:pPr marL="489010" lvl="2" indent="-342900">
-              <a:buFont typeface="Arial" panose="020B0604020202020204" pitchFamily="34" charset="0"/>
-              <a:buChar char="•"/>
+            <a:pPr marL="146110" lvl="2" indent="0">
+              <a:buNone/>
             </a:pPr>
             <a:endParaRPr lang="en-US" sz="200" dirty="0">
-              <a:solidFill>
-                <a:srgbClr val="000000"/>
-              </a:solidFill>
-            </a:endParaRPr>
-          </a:p>
-          <a:p>
-            <a:pPr marL="342900" indent="-342900" algn="l">
-              <a:buFont typeface="Arial" panose="020B0604020202020204" pitchFamily="34" charset="0"/>
-              <a:buChar char="•"/>
-            </a:pPr>
-            <a:endParaRPr lang="en-US" sz="1600" dirty="0">
-              <a:solidFill>
-                <a:srgbClr val="000000"/>
-              </a:solidFill>
-            </a:endParaRPr>
-          </a:p>
-          <a:p>
-            <a:pPr marL="0" indent="0" algn="l"/>
-            <a:endParaRPr lang="en-US" sz="1600" dirty="0">
-              <a:solidFill>
-                <a:srgbClr val="000000"/>
-              </a:solidFill>
-            </a:endParaRPr>
-          </a:p>
-          <a:p>
-            <a:pPr marL="342900" indent="-342900" algn="l">
-              <a:buFont typeface="Arial" panose="020B0604020202020204" pitchFamily="34" charset="0"/>
-              <a:buChar char="•"/>
-            </a:pPr>
-            <a:endParaRPr lang="en-US" sz="1600" dirty="0">
               <a:solidFill>
                 <a:srgbClr val="000000"/>
               </a:solidFill>
@@ -32233,6 +32845,369 @@
           </a:xfrm>
         </p:spPr>
       </p:pic>
+      <p:sp>
+        <p:nvSpPr>
+          <p:cNvPr id="2" name="BlokTextu 1">
+            <a:extLst>
+              <a:ext uri="{FF2B5EF4-FFF2-40B4-BE49-F238E27FC236}">
+                <a16:creationId xmlns:a16="http://schemas.microsoft.com/office/drawing/2014/main" id="{F76B0ADD-1514-E8C3-5BA3-BE6BD8B7F62B}"/>
+              </a:ext>
+            </a:extLst>
+          </p:cNvPr>
+          <p:cNvSpPr txBox="1"/>
+          <p:nvPr/>
+        </p:nvSpPr>
+        <p:spPr>
+          <a:xfrm>
+            <a:off x="880318" y="3689350"/>
+            <a:ext cx="7383364" cy="1169551"/>
+          </a:xfrm>
+          <a:prstGeom prst="rect">
+            <a:avLst/>
+          </a:prstGeom>
+          <a:noFill/>
+        </p:spPr>
+        <p:txBody>
+          <a:bodyPr wrap="square" rtlCol="0">
+            <a:spAutoFit/>
+          </a:bodyPr>
+          <a:lstStyle/>
+          <a:p>
+            <a:r>
+              <a:rPr lang="sk-SK" sz="1000" b="1" dirty="0"/>
+              <a:t>IEEE 802.1 – </a:t>
+            </a:r>
+            <a:r>
+              <a:rPr lang="sk-SK" sz="1000" b="1" dirty="0" err="1"/>
+              <a:t>Higher</a:t>
+            </a:r>
+            <a:r>
+              <a:rPr lang="sk-SK" sz="1000" b="1" dirty="0"/>
+              <a:t> </a:t>
+            </a:r>
+            <a:r>
+              <a:rPr lang="sk-SK" sz="1000" b="1" dirty="0" err="1"/>
+              <a:t>Layer</a:t>
+            </a:r>
+            <a:r>
+              <a:rPr lang="sk-SK" sz="1000" b="1" dirty="0"/>
+              <a:t> LAN </a:t>
+            </a:r>
+            <a:r>
+              <a:rPr lang="sk-SK" sz="1000" b="1" dirty="0" err="1"/>
+              <a:t>Protocols</a:t>
+            </a:r>
+            <a:r>
+              <a:rPr lang="sk-SK" sz="1000" b="1" dirty="0"/>
+              <a:t>, </a:t>
+            </a:r>
+            <a:r>
+              <a:rPr lang="sk-SK" sz="1000" b="1" dirty="0" err="1"/>
+              <a:t>Bridging</a:t>
+            </a:r>
+            <a:r>
+              <a:rPr lang="sk-SK" sz="1000" b="1" dirty="0"/>
+              <a:t> &amp; Management</a:t>
+            </a:r>
+            <a:r>
+              <a:rPr lang="sk-SK" sz="1000" dirty="0"/>
+              <a:t> </a:t>
+            </a:r>
+            <a:r>
+              <a:rPr lang="sk-SK" sz="1000" b="1" dirty="0"/>
+              <a:t>IEEE 802.2 – </a:t>
+            </a:r>
+            <a:r>
+              <a:rPr lang="sk-SK" sz="1000" b="1" dirty="0" err="1"/>
+              <a:t>Logical</a:t>
+            </a:r>
+            <a:r>
+              <a:rPr lang="sk-SK" sz="1000" b="1" dirty="0"/>
+              <a:t> </a:t>
+            </a:r>
+            <a:r>
+              <a:rPr lang="sk-SK" sz="1000" b="1" dirty="0" err="1"/>
+              <a:t>Link</a:t>
+            </a:r>
+            <a:r>
+              <a:rPr lang="sk-SK" sz="1000" b="1" dirty="0"/>
+              <a:t> </a:t>
+            </a:r>
+            <a:r>
+              <a:rPr lang="sk-SK" sz="1000" b="1" dirty="0" err="1"/>
+              <a:t>Control</a:t>
+            </a:r>
+            <a:r>
+              <a:rPr lang="sk-SK" sz="1000" b="1" dirty="0"/>
+              <a:t> (LLC)</a:t>
+            </a:r>
+            <a:r>
+              <a:rPr lang="sk-SK" sz="1000" dirty="0"/>
+              <a:t> </a:t>
+            </a:r>
+            <a:r>
+              <a:rPr lang="sk-SK" sz="1000" b="1" dirty="0"/>
+              <a:t>IEEE 802.3 – Ethernet (CSMA/CD IEEE 802.5 – Token Ring</a:t>
+            </a:r>
+            <a:r>
+              <a:rPr lang="sk-SK" sz="1000" dirty="0"/>
+              <a:t> (MAC) </a:t>
+            </a:r>
+            <a:r>
+              <a:rPr lang="sk-SK" sz="1000" b="1" dirty="0"/>
+              <a:t>IEEE 802.6 – </a:t>
+            </a:r>
+            <a:r>
+              <a:rPr lang="sk-SK" sz="1000" b="1" dirty="0" err="1"/>
+              <a:t>Metropolitan</a:t>
+            </a:r>
+            <a:r>
+              <a:rPr lang="sk-SK" sz="1000" b="1" dirty="0"/>
+              <a:t> </a:t>
+            </a:r>
+            <a:r>
+              <a:rPr lang="sk-SK" sz="1000" b="1" dirty="0" err="1"/>
+              <a:t>Area</a:t>
+            </a:r>
+            <a:r>
+              <a:rPr lang="sk-SK" sz="1000" b="1" dirty="0"/>
+              <a:t> </a:t>
+            </a:r>
+            <a:r>
+              <a:rPr lang="sk-SK" sz="1000" b="1" dirty="0" err="1"/>
+              <a:t>Networks</a:t>
+            </a:r>
+            <a:r>
+              <a:rPr lang="sk-SK" sz="1000" b="1" dirty="0"/>
+              <a:t> (DQDB)</a:t>
+            </a:r>
+            <a:r>
+              <a:rPr lang="sk-SK" sz="1000" dirty="0"/>
+              <a:t> </a:t>
+            </a:r>
+            <a:r>
+              <a:rPr lang="sk-SK" sz="1000" b="1" dirty="0"/>
+              <a:t>IEEE 802.10 – LAN/MAN </a:t>
+            </a:r>
+            <a:r>
+              <a:rPr lang="sk-SK" sz="1000" b="1" dirty="0" err="1"/>
+              <a:t>Security</a:t>
+            </a:r>
+            <a:r>
+              <a:rPr lang="sk-SK" sz="1000" dirty="0"/>
+              <a:t> </a:t>
+            </a:r>
+            <a:r>
+              <a:rPr lang="sk-SK" sz="1000" b="1" dirty="0"/>
+              <a:t>IEEE 802.11 – </a:t>
+            </a:r>
+            <a:r>
+              <a:rPr lang="sk-SK" sz="1000" b="1" dirty="0" err="1"/>
+              <a:t>Wireless</a:t>
+            </a:r>
+            <a:r>
+              <a:rPr lang="sk-SK" sz="1000" b="1" dirty="0"/>
+              <a:t> LAN (Wi‑Fi)</a:t>
+            </a:r>
+            <a:r>
+              <a:rPr lang="sk-SK" sz="1000" dirty="0"/>
+              <a:t>, zahŕňa 802.11a/b/g/n/</a:t>
+            </a:r>
+            <a:r>
+              <a:rPr lang="sk-SK" sz="1000" dirty="0" err="1"/>
+              <a:t>ac</a:t>
+            </a:r>
+            <a:r>
+              <a:rPr lang="sk-SK" sz="1000" dirty="0"/>
+              <a:t>/ad atď. </a:t>
+            </a:r>
+            <a:r>
+              <a:rPr lang="sk-SK" sz="1000" b="1" dirty="0"/>
+              <a:t>IEEE 802.15 – </a:t>
+            </a:r>
+            <a:r>
+              <a:rPr lang="sk-SK" sz="1000" b="1" dirty="0" err="1"/>
+              <a:t>Wireless</a:t>
+            </a:r>
+            <a:r>
+              <a:rPr lang="sk-SK" sz="1000" b="1" dirty="0"/>
+              <a:t> </a:t>
+            </a:r>
+            <a:r>
+              <a:rPr lang="sk-SK" sz="1000" b="1" dirty="0" err="1"/>
+              <a:t>Personal</a:t>
+            </a:r>
+            <a:r>
+              <a:rPr lang="sk-SK" sz="1000" b="1" dirty="0"/>
+              <a:t> </a:t>
+            </a:r>
+            <a:r>
+              <a:rPr lang="sk-SK" sz="1000" b="1" dirty="0" err="1"/>
+              <a:t>Area</a:t>
+            </a:r>
+            <a:r>
+              <a:rPr lang="sk-SK" sz="1000" b="1" dirty="0"/>
+              <a:t> </a:t>
+            </a:r>
+            <a:r>
+              <a:rPr lang="sk-SK" sz="1000" b="1" dirty="0" err="1"/>
+              <a:t>Networks</a:t>
+            </a:r>
+            <a:r>
+              <a:rPr lang="sk-SK" sz="1000" b="1" dirty="0"/>
+              <a:t> (WPAN)</a:t>
+            </a:r>
+            <a:r>
+              <a:rPr lang="sk-SK" sz="1000" dirty="0"/>
+              <a:t> — napr. Bluetooth, </a:t>
+            </a:r>
+            <a:r>
+              <a:rPr lang="sk-SK" sz="1000" dirty="0" err="1"/>
+              <a:t>Zigbee</a:t>
+            </a:r>
+            <a:r>
+              <a:rPr lang="sk-SK" sz="1000" dirty="0"/>
+              <a:t> </a:t>
+            </a:r>
+            <a:r>
+              <a:rPr lang="sk-SK" sz="1000" b="1" dirty="0"/>
+              <a:t>IEEE 802.16 – </a:t>
+            </a:r>
+            <a:r>
+              <a:rPr lang="sk-SK" sz="1000" b="1" dirty="0" err="1"/>
+              <a:t>Broadband</a:t>
+            </a:r>
+            <a:r>
+              <a:rPr lang="sk-SK" sz="1000" b="1" dirty="0"/>
+              <a:t> </a:t>
+            </a:r>
+            <a:r>
+              <a:rPr lang="sk-SK" sz="1000" b="1" dirty="0" err="1"/>
+              <a:t>Wireless</a:t>
+            </a:r>
+            <a:r>
+              <a:rPr lang="sk-SK" sz="1000" b="1" dirty="0"/>
+              <a:t> Access (</a:t>
+            </a:r>
+            <a:r>
+              <a:rPr lang="sk-SK" sz="1000" b="1" dirty="0" err="1"/>
+              <a:t>WiMAX</a:t>
+            </a:r>
+            <a:r>
+              <a:rPr lang="sk-SK" sz="1000" b="1" dirty="0"/>
+              <a:t>)</a:t>
+            </a:r>
+            <a:r>
+              <a:rPr lang="sk-SK" sz="1000" dirty="0"/>
+              <a:t> </a:t>
+            </a:r>
+            <a:r>
+              <a:rPr lang="sk-SK" sz="1000" b="1" dirty="0"/>
+              <a:t>IEEE 802.17 – </a:t>
+            </a:r>
+            <a:r>
+              <a:rPr lang="sk-SK" sz="1000" b="1" dirty="0" err="1"/>
+              <a:t>Resilient</a:t>
+            </a:r>
+            <a:r>
+              <a:rPr lang="sk-SK" sz="1000" b="1" dirty="0"/>
+              <a:t> </a:t>
+            </a:r>
+            <a:r>
+              <a:rPr lang="sk-SK" sz="1000" b="1" dirty="0" err="1"/>
+              <a:t>Packet</a:t>
+            </a:r>
+            <a:r>
+              <a:rPr lang="sk-SK" sz="1000" b="1" dirty="0"/>
+              <a:t> Ring (RPR)</a:t>
+            </a:r>
+            <a:r>
+              <a:rPr lang="sk-SK" sz="1000" dirty="0"/>
+              <a:t> (MAC pre MAN/LAN) </a:t>
+            </a:r>
+            <a:r>
+              <a:rPr lang="sk-SK" sz="1000" b="1" dirty="0"/>
+              <a:t>IEEE 802.20 – Mobile </a:t>
+            </a:r>
+            <a:r>
+              <a:rPr lang="sk-SK" sz="1000" b="1" dirty="0" err="1"/>
+              <a:t>Broadband</a:t>
+            </a:r>
+            <a:r>
+              <a:rPr lang="sk-SK" sz="1000" b="1" dirty="0"/>
+              <a:t> </a:t>
+            </a:r>
+            <a:r>
+              <a:rPr lang="sk-SK" sz="1000" b="1" dirty="0" err="1"/>
+              <a:t>Wireless</a:t>
+            </a:r>
+            <a:r>
+              <a:rPr lang="sk-SK" sz="1000" b="1" dirty="0"/>
+              <a:t> Access</a:t>
+            </a:r>
+            <a:r>
+              <a:rPr lang="sk-SK" sz="1000" dirty="0"/>
+              <a:t> </a:t>
+            </a:r>
+            <a:r>
+              <a:rPr lang="sk-SK" sz="1000" b="1" dirty="0"/>
+              <a:t>IEEE 802.21 – </a:t>
+            </a:r>
+            <a:r>
+              <a:rPr lang="sk-SK" sz="1000" b="1" dirty="0" err="1"/>
+              <a:t>Media</a:t>
+            </a:r>
+            <a:r>
+              <a:rPr lang="sk-SK" sz="1000" b="1" dirty="0"/>
+              <a:t> </a:t>
+            </a:r>
+            <a:r>
+              <a:rPr lang="sk-SK" sz="1000" b="1" dirty="0" err="1"/>
+              <a:t>Independent</a:t>
+            </a:r>
+            <a:r>
+              <a:rPr lang="sk-SK" sz="1000" b="1" dirty="0"/>
+              <a:t> </a:t>
+            </a:r>
+            <a:r>
+              <a:rPr lang="sk-SK" sz="1000" b="1" dirty="0" err="1"/>
+              <a:t>Handover</a:t>
+            </a:r>
+            <a:r>
+              <a:rPr lang="sk-SK" sz="1000" b="1" dirty="0"/>
+              <a:t> (MIH)</a:t>
+            </a:r>
+            <a:r>
+              <a:rPr lang="sk-SK" sz="1000" dirty="0"/>
+              <a:t> </a:t>
+            </a:r>
+            <a:r>
+              <a:rPr lang="sk-SK" sz="1000" b="1" dirty="0"/>
+              <a:t>IEEE 802.22 – </a:t>
+            </a:r>
+            <a:r>
+              <a:rPr lang="sk-SK" sz="1000" b="1" dirty="0" err="1"/>
+              <a:t>Cognitive</a:t>
+            </a:r>
+            <a:r>
+              <a:rPr lang="sk-SK" sz="1000" b="1" dirty="0"/>
+              <a:t> </a:t>
+            </a:r>
+            <a:r>
+              <a:rPr lang="sk-SK" sz="1000" b="1" dirty="0" err="1"/>
+              <a:t>Wireless</a:t>
+            </a:r>
+            <a:r>
+              <a:rPr lang="sk-SK" sz="1000" b="1" dirty="0"/>
+              <a:t> RAN (WRAN)</a:t>
+            </a:r>
+            <a:r>
+              <a:rPr lang="sk-SK" sz="1000" dirty="0"/>
+              <a:t> – MAC + PHY pre kognitívne siete využívajúce TV pásma</a:t>
+            </a:r>
+          </a:p>
+        </p:txBody>
+      </p:sp>
     </p:spTree>
     <p:extLst>
       <p:ext uri="{BB962C8B-B14F-4D97-AF65-F5344CB8AC3E}">
@@ -38316,6 +39291,19 @@
               </a:rPr>
               <a:t> – provides high availability but requires every end system to be connected to every other end system.</a:t>
             </a:r>
+            <a:endParaRPr lang="en-US" sz="1600" dirty="0">
+              <a:solidFill>
+                <a:srgbClr val="000000"/>
+              </a:solidFill>
+            </a:endParaRPr>
+          </a:p>
+          <a:p>
+            <a:pPr marL="0" indent="0" algn="l"/>
+            <a:endParaRPr lang="en-US" sz="1600" dirty="0">
+              <a:solidFill>
+                <a:srgbClr val="000000"/>
+              </a:solidFill>
+            </a:endParaRPr>
           </a:p>
           <a:p>
             <a:pPr marL="342900" indent="-342900" algn="l">
@@ -38328,49 +39316,149 @@
               </a:solidFill>
             </a:endParaRPr>
           </a:p>
-          <a:p>
-            <a:pPr marL="489010" lvl="2" indent="-342900">
-              <a:buFont typeface="Arial" panose="020B0604020202020204" pitchFamily="34" charset="0"/>
-              <a:buChar char="•"/>
-            </a:pPr>
-            <a:endParaRPr lang="en-US" sz="200" dirty="0">
-              <a:solidFill>
-                <a:srgbClr val="000000"/>
-              </a:solidFill>
-            </a:endParaRPr>
-          </a:p>
-          <a:p>
-            <a:pPr marL="342900" indent="-342900" algn="l">
-              <a:buFont typeface="Arial" panose="020B0604020202020204" pitchFamily="34" charset="0"/>
-              <a:buChar char="•"/>
-            </a:pPr>
-            <a:endParaRPr lang="en-US" sz="1600" dirty="0">
-              <a:solidFill>
-                <a:srgbClr val="000000"/>
-              </a:solidFill>
-            </a:endParaRPr>
-          </a:p>
-          <a:p>
-            <a:pPr marL="0" indent="0" algn="l"/>
-            <a:endParaRPr lang="en-US" sz="1600" dirty="0">
-              <a:solidFill>
-                <a:srgbClr val="000000"/>
-              </a:solidFill>
-            </a:endParaRPr>
-          </a:p>
-          <a:p>
-            <a:pPr marL="342900" indent="-342900" algn="l">
-              <a:buFont typeface="Arial" panose="020B0604020202020204" pitchFamily="34" charset="0"/>
-              <a:buChar char="•"/>
-            </a:pPr>
-            <a:endParaRPr lang="en-US" sz="1600" dirty="0">
-              <a:solidFill>
-                <a:srgbClr val="000000"/>
-              </a:solidFill>
-            </a:endParaRPr>
-          </a:p>
         </p:txBody>
       </p:sp>
+      <p:pic>
+        <p:nvPicPr>
+          <p:cNvPr id="1030" name="Picture 6" descr="Point-to-Point Topology">
+            <a:extLst>
+              <a:ext uri="{FF2B5EF4-FFF2-40B4-BE49-F238E27FC236}">
+                <a16:creationId xmlns:a16="http://schemas.microsoft.com/office/drawing/2014/main" id="{AA3333AF-72A2-0C00-8A02-8C62E29EEE47}"/>
+              </a:ext>
+            </a:extLst>
+          </p:cNvPr>
+          <p:cNvPicPr>
+            <a:picLocks noChangeAspect="1" noChangeArrowheads="1"/>
+          </p:cNvPicPr>
+          <p:nvPr/>
+        </p:nvPicPr>
+        <p:blipFill>
+          <a:blip r:embed="rId3">
+            <a:extLst>
+              <a:ext uri="{28A0092B-C50C-407E-A947-70E740481C1C}">
+                <a14:useLocalDpi xmlns:a14="http://schemas.microsoft.com/office/drawing/2010/main" val="0"/>
+              </a:ext>
+            </a:extLst>
+          </a:blip>
+          <a:srcRect/>
+          <a:stretch>
+            <a:fillRect/>
+          </a:stretch>
+        </p:blipFill>
+        <p:spPr bwMode="auto">
+          <a:xfrm>
+            <a:off x="601617" y="3614202"/>
+            <a:ext cx="2298337" cy="320411"/>
+          </a:xfrm>
+          <a:prstGeom prst="rect">
+            <a:avLst/>
+          </a:prstGeom>
+          <a:noFill/>
+          <a:extLst>
+            <a:ext uri="{909E8E84-426E-40DD-AFC4-6F175D3DCCD1}">
+              <a14:hiddenFill xmlns:a14="http://schemas.microsoft.com/office/drawing/2010/main">
+                <a:solidFill>
+                  <a:srgbClr val="FFFFFF"/>
+                </a:solidFill>
+              </a14:hiddenFill>
+            </a:ext>
+          </a:extLst>
+        </p:spPr>
+      </p:pic>
+      <p:pic>
+        <p:nvPicPr>
+          <p:cNvPr id="1032" name="Picture 8" descr="full mesh router topology">
+            <a:extLst>
+              <a:ext uri="{FF2B5EF4-FFF2-40B4-BE49-F238E27FC236}">
+                <a16:creationId xmlns:a16="http://schemas.microsoft.com/office/drawing/2014/main" id="{1E8F2856-286F-7322-AF81-49D73C40AE06}"/>
+              </a:ext>
+            </a:extLst>
+          </p:cNvPr>
+          <p:cNvPicPr>
+            <a:picLocks noChangeAspect="1" noChangeArrowheads="1"/>
+          </p:cNvPicPr>
+          <p:nvPr/>
+        </p:nvPicPr>
+        <p:blipFill>
+          <a:blip r:embed="rId4">
+            <a:extLst>
+              <a:ext uri="{28A0092B-C50C-407E-A947-70E740481C1C}">
+                <a14:useLocalDpi xmlns:a14="http://schemas.microsoft.com/office/drawing/2010/main" val="0"/>
+              </a:ext>
+            </a:extLst>
+          </a:blip>
+          <a:srcRect/>
+          <a:stretch>
+            <a:fillRect/>
+          </a:stretch>
+        </p:blipFill>
+        <p:spPr bwMode="auto">
+          <a:xfrm>
+            <a:off x="5533175" y="2842301"/>
+            <a:ext cx="2650172" cy="1864211"/>
+          </a:xfrm>
+          <a:prstGeom prst="rect">
+            <a:avLst/>
+          </a:prstGeom>
+          <a:noFill/>
+          <a:extLst>
+            <a:ext uri="{909E8E84-426E-40DD-AFC4-6F175D3DCCD1}">
+              <a14:hiddenFill xmlns:a14="http://schemas.microsoft.com/office/drawing/2010/main">
+                <a:solidFill>
+                  <a:srgbClr val="FFFFFF"/>
+                </a:solidFill>
+              </a14:hiddenFill>
+            </a:ext>
+          </a:extLst>
+        </p:spPr>
+      </p:pic>
+      <p:pic>
+        <p:nvPicPr>
+          <p:cNvPr id="1034" name="Picture 10" descr="Wan Three Sites">
+            <a:extLst>
+              <a:ext uri="{FF2B5EF4-FFF2-40B4-BE49-F238E27FC236}">
+                <a16:creationId xmlns:a16="http://schemas.microsoft.com/office/drawing/2014/main" id="{660EE9EB-B216-4E36-181B-6ADB0BBC8FFA}"/>
+              </a:ext>
+            </a:extLst>
+          </p:cNvPr>
+          <p:cNvPicPr>
+            <a:picLocks noChangeAspect="1" noChangeArrowheads="1"/>
+          </p:cNvPicPr>
+          <p:nvPr/>
+        </p:nvPicPr>
+        <p:blipFill>
+          <a:blip r:embed="rId5">
+            <a:extLst>
+              <a:ext uri="{28A0092B-C50C-407E-A947-70E740481C1C}">
+                <a14:useLocalDpi xmlns:a14="http://schemas.microsoft.com/office/drawing/2010/main" val="0"/>
+              </a:ext>
+            </a:extLst>
+          </a:blip>
+          <a:srcRect/>
+          <a:stretch>
+            <a:fillRect/>
+          </a:stretch>
+        </p:blipFill>
+        <p:spPr bwMode="auto">
+          <a:xfrm>
+            <a:off x="3009902" y="3005075"/>
+            <a:ext cx="2523273" cy="1701437"/>
+          </a:xfrm>
+          <a:prstGeom prst="rect">
+            <a:avLst/>
+          </a:prstGeom>
+          <a:noFill/>
+          <a:extLst>
+            <a:ext uri="{909E8E84-426E-40DD-AFC4-6F175D3DCCD1}">
+              <a14:hiddenFill xmlns:a14="http://schemas.microsoft.com/office/drawing/2010/main">
+                <a:solidFill>
+                  <a:srgbClr val="FFFFFF"/>
+                </a:solidFill>
+              </a14:hiddenFill>
+            </a:ext>
+          </a:extLst>
+        </p:spPr>
+      </p:pic>
     </p:spTree>
     <p:extLst>
       <p:ext uri="{BB962C8B-B14F-4D97-AF65-F5344CB8AC3E}">
